--- a/assets/Mohiddin_Moghal_Professional_Masterpiece.pptx
+++ b/assets/Mohiddin_Moghal_Professional_Masterpiece.pptx
@@ -4,6 +4,9 @@
   <p:sldMasterIdLst>
     <p:sldMasterId id="2147483648" r:id="rId1"/>
   </p:sldMasterIdLst>
+  <p:notesMasterIdLst>
+    <p:notesMasterId r:id="rId12"/>
+  </p:notesMasterIdLst>
   <p:sldIdLst>
     <p:sldId id="256" r:id="rId2"/>
     <p:sldId id="257" r:id="rId3"/>
@@ -16,9 +19,6 @@
     <p:sldId id="264" r:id="rId10"/>
     <p:sldId id="265" r:id="rId11"/>
   </p:sldIdLst>
-  <p:notesMasterIdLst>
-    <p:notesMasterId r:id="rId12"/>
-  </p:notesMasterIdLst>
   <p:sldSz cx="12192000" cy="6858000"/>
   <p:notesSz cx="6858000" cy="12192000"/>
   <p:defaultTextStyle>
@@ -113,6 +113,11 @@
       </a:defRPr>
     </a:lvl9pPr>
   </p:defaultTextStyle>
+  <p:extLst>
+    <p:ext uri="{EFAFB233-063F-42B5-8137-9DF3F51BA10A}">
+      <p15:sldGuideLst xmlns:p15="http://schemas.microsoft.com/office/powerpoint/2012/main"/>
+    </p:ext>
+  </p:extLst>
 </p:presentation>
 </file>
 
@@ -138,234 +143,10 @@
           <a:chExt cx="0" cy="0"/>
         </a:xfrm>
       </p:grpSpPr>
-      <p:sp>
-        <p:nvSpPr>
-          <p:cNvPr id="2" name="Header Placeholder 1"/>
-          <p:cNvSpPr>
-            <a:spLocks noGrp="1"/>
-          </p:cNvSpPr>
-          <p:nvPr>
-            <p:ph type="hdr" sz="quarter"/>
-          </p:nvPr>
-        </p:nvSpPr>
-        <p:spPr>
-          <a:xfrm>
-            <a:off x="0" y="0"/>
-            <a:ext cx="2971800" cy="458788"/>
-          </a:xfrm>
-          <a:prstGeom prst="rect">
-            <a:avLst/>
-          </a:prstGeom>
-        </p:spPr>
-        <p:txBody>
-          <a:bodyPr vert="horz" lIns="91440" tIns="45720" rIns="91440" bIns="45720" rtlCol="0"/>
-          <a:lstStyle>
-            <a:lvl1pPr algn="l">
-              <a:defRPr sz="1200"/>
-            </a:lvl1pPr>
-          </a:lstStyle>
-          <a:p>
-            <a:endParaRPr lang="en-US"/>
-          </a:p>
-        </p:txBody>
-      </p:sp>
-      <p:sp>
-        <p:nvSpPr>
-          <p:cNvPr id="3" name="Date Placeholder 2"/>
-          <p:cNvSpPr>
-            <a:spLocks noGrp="1"/>
-          </p:cNvSpPr>
-          <p:nvPr>
-            <p:ph type="dt" idx="1"/>
-          </p:nvPr>
-        </p:nvSpPr>
-        <p:spPr>
-          <a:xfrm>
-            <a:off x="3884613" y="0"/>
-            <a:ext cx="2971800" cy="458788"/>
-          </a:xfrm>
-          <a:prstGeom prst="rect">
-            <a:avLst/>
-          </a:prstGeom>
-        </p:spPr>
-        <p:txBody>
-          <a:bodyPr vert="horz" lIns="91440" tIns="45720" rIns="91440" bIns="45720" rtlCol="0"/>
-          <a:lstStyle>
-            <a:lvl1pPr algn="r">
-              <a:defRPr sz="1200"/>
-            </a:lvl1pPr>
-          </a:lstStyle>
-          <a:p>
-            <a:fld id="{5282F153-3F37-0F45-9E97-73ACFA13230C}" type="datetimeFigureOut">
-              <a:rPr lang="en-US"/>
-              <a:t>7/23/19</a:t>
-            </a:fld>
-            <a:endParaRPr lang="en-US"/>
-          </a:p>
-        </p:txBody>
-      </p:sp>
-      <p:sp>
-        <p:nvSpPr>
-          <p:cNvPr id="4" name="Slide Image Placeholder 3"/>
-          <p:cNvSpPr>
-            <a:spLocks noGrp="1" noRot="1" noChangeAspect="1"/>
-          </p:cNvSpPr>
-          <p:nvPr>
-            <p:ph type="sldImg" idx="2"/>
-          </p:nvPr>
-        </p:nvSpPr>
-        <p:spPr>
-          <a:xfrm>
-            <a:off x="685800" y="1143000"/>
-            <a:ext cx="5486400" cy="3086100"/>
-          </a:xfrm>
-          <a:prstGeom prst="rect">
-            <a:avLst/>
-          </a:prstGeom>
-          <a:noFill/>
-          <a:ln w="12700">
-            <a:solidFill>
-              <a:prstClr val="black"/>
-            </a:solidFill>
-          </a:ln>
-        </p:spPr>
-        <p:txBody>
-          <a:bodyPr vert="horz" lIns="91440" tIns="45720" rIns="91440" bIns="45720" rtlCol="0" anchor="ctr"/>
-          <a:lstStyle/>
-          <a:p>
-            <a:endParaRPr lang="en-US"/>
-          </a:p>
-        </p:txBody>
-      </p:sp>
-      <p:sp>
-        <p:nvSpPr>
-          <p:cNvPr id="5" name="Notes Placeholder 4"/>
-          <p:cNvSpPr>
-            <a:spLocks noGrp="1"/>
-          </p:cNvSpPr>
-          <p:nvPr>
-            <p:ph type="body" sz="quarter" idx="3"/>
-          </p:nvPr>
-        </p:nvSpPr>
-        <p:spPr>
-          <a:xfrm>
-            <a:off x="685800" y="4400550"/>
-            <a:ext cx="5486400" cy="3600450"/>
-          </a:xfrm>
-          <a:prstGeom prst="rect">
-            <a:avLst/>
-          </a:prstGeom>
-        </p:spPr>
-        <p:txBody>
-          <a:bodyPr vert="horz" lIns="91440" tIns="45720" rIns="91440" bIns="45720" rtlCol="0"/>
-          <a:lstStyle/>
-          <a:p>
-            <a:pPr lvl="0"/>
-            <a:r>
-              <a:rPr lang="en-US"/>
-              <a:t>Click to edit Master text styles</a:t>
-            </a:r>
-          </a:p>
-          <a:p>
-            <a:pPr lvl="1"/>
-            <a:r>
-              <a:rPr lang="en-US"/>
-              <a:t>Second level</a:t>
-            </a:r>
-          </a:p>
-          <a:p>
-            <a:pPr lvl="2"/>
-            <a:r>
-              <a:rPr lang="en-US"/>
-              <a:t>Third level</a:t>
-            </a:r>
-          </a:p>
-          <a:p>
-            <a:pPr lvl="3"/>
-            <a:r>
-              <a:rPr lang="en-US"/>
-              <a:t>Fourth level</a:t>
-            </a:r>
-          </a:p>
-          <a:p>
-            <a:pPr lvl="4"/>
-            <a:r>
-              <a:rPr lang="en-US"/>
-              <a:t>Fifth level</a:t>
-            </a:r>
-          </a:p>
-        </p:txBody>
-      </p:sp>
-      <p:sp>
-        <p:nvSpPr>
-          <p:cNvPr id="6" name="Footer Placeholder 5"/>
-          <p:cNvSpPr>
-            <a:spLocks noGrp="1"/>
-          </p:cNvSpPr>
-          <p:nvPr>
-            <p:ph type="ftr" sz="quarter" idx="4"/>
-          </p:nvPr>
-        </p:nvSpPr>
-        <p:spPr>
-          <a:xfrm>
-            <a:off x="0" y="8685213"/>
-            <a:ext cx="2971800" cy="458787"/>
-          </a:xfrm>
-          <a:prstGeom prst="rect">
-            <a:avLst/>
-          </a:prstGeom>
-        </p:spPr>
-        <p:txBody>
-          <a:bodyPr vert="horz" lIns="91440" tIns="45720" rIns="91440" bIns="45720" rtlCol="0" anchor="b"/>
-          <a:lstStyle>
-            <a:lvl1pPr algn="l">
-              <a:defRPr sz="1200"/>
-            </a:lvl1pPr>
-          </a:lstStyle>
-          <a:p>
-            <a:endParaRPr lang="en-US"/>
-          </a:p>
-        </p:txBody>
-      </p:sp>
-      <p:sp>
-        <p:nvSpPr>
-          <p:cNvPr id="7" name="Slide Number Placeholder 6"/>
-          <p:cNvSpPr>
-            <a:spLocks noGrp="1"/>
-          </p:cNvSpPr>
-          <p:nvPr>
-            <p:ph type="sldNum" sz="quarter" idx="5"/>
-          </p:nvPr>
-        </p:nvSpPr>
-        <p:spPr>
-          <a:xfrm>
-            <a:off x="3884613" y="8685213"/>
-            <a:ext cx="2971800" cy="458787"/>
-          </a:xfrm>
-          <a:prstGeom prst="rect">
-            <a:avLst/>
-          </a:prstGeom>
-        </p:spPr>
-        <p:txBody>
-          <a:bodyPr vert="horz" lIns="91440" tIns="45720" rIns="91440" bIns="45720" rtlCol="0" anchor="b"/>
-          <a:lstStyle>
-            <a:lvl1pPr algn="r">
-              <a:defRPr sz="1200"/>
-            </a:lvl1pPr>
-          </a:lstStyle>
-          <a:p>
-            <a:fld id="{CE5E9CC1-C706-0F49-92D6-E571CC5EEA8F}" type="slidenum">
-              <a:rPr lang="en-US"/>
-              <a:t>‹#›</a:t>
-            </a:fld>
-            <a:endParaRPr lang="en-US"/>
-          </a:p>
-        </p:txBody>
-      </p:sp>
     </p:spTree>
     <p:extLst>
       <p:ext uri="{BB962C8B-B14F-4D97-AF65-F5344CB8AC3E}">
-        <p14:creationId xmlns:p14="http://schemas.microsoft.com/office/powerpoint/2010/main" val="1024086991"/>
+        <p14:creationId xmlns:p14="http://schemas.microsoft.com/office/powerpoint/2010/main" val="312044578"/>
       </p:ext>
     </p:extLst>
   </p:cSld>
@@ -509,10 +290,6 @@
           <a:bodyPr/>
           <a:lstStyle/>
           <a:p>
-            <a:r>
-              <a:rPr lang="en-US" dirty="0"/>
-              <a:t/>
-            </a:r>
             <a:endParaRPr lang="en-US" dirty="0"/>
           </a:p>
         </p:txBody>
@@ -597,10 +374,6 @@
           <a:bodyPr/>
           <a:lstStyle/>
           <a:p>
-            <a:r>
-              <a:rPr lang="en-US" dirty="0"/>
-              <a:t/>
-            </a:r>
             <a:endParaRPr lang="en-US" dirty="0"/>
           </a:p>
         </p:txBody>
@@ -685,10 +458,6 @@
           <a:bodyPr/>
           <a:lstStyle/>
           <a:p>
-            <a:r>
-              <a:rPr lang="en-US" dirty="0"/>
-              <a:t/>
-            </a:r>
             <a:endParaRPr lang="en-US" dirty="0"/>
           </a:p>
         </p:txBody>
@@ -773,10 +542,6 @@
           <a:bodyPr/>
           <a:lstStyle/>
           <a:p>
-            <a:r>
-              <a:rPr lang="en-US" dirty="0"/>
-              <a:t/>
-            </a:r>
             <a:endParaRPr lang="en-US" dirty="0"/>
           </a:p>
         </p:txBody>
@@ -861,10 +626,6 @@
           <a:bodyPr/>
           <a:lstStyle/>
           <a:p>
-            <a:r>
-              <a:rPr lang="en-US" dirty="0"/>
-              <a:t/>
-            </a:r>
             <a:endParaRPr lang="en-US" dirty="0"/>
           </a:p>
         </p:txBody>
@@ -949,10 +710,6 @@
           <a:bodyPr/>
           <a:lstStyle/>
           <a:p>
-            <a:r>
-              <a:rPr lang="en-US" dirty="0"/>
-              <a:t/>
-            </a:r>
             <a:endParaRPr lang="en-US" dirty="0"/>
           </a:p>
         </p:txBody>
@@ -1037,10 +794,6 @@
           <a:bodyPr/>
           <a:lstStyle/>
           <a:p>
-            <a:r>
-              <a:rPr lang="en-US" dirty="0"/>
-              <a:t/>
-            </a:r>
             <a:endParaRPr lang="en-US" dirty="0"/>
           </a:p>
         </p:txBody>
@@ -1125,10 +878,6 @@
           <a:bodyPr/>
           <a:lstStyle/>
           <a:p>
-            <a:r>
-              <a:rPr lang="en-US" dirty="0"/>
-              <a:t/>
-            </a:r>
             <a:endParaRPr lang="en-US" dirty="0"/>
           </a:p>
         </p:txBody>
@@ -1213,10 +962,6 @@
           <a:bodyPr/>
           <a:lstStyle/>
           <a:p>
-            <a:r>
-              <a:rPr lang="en-US" dirty="0"/>
-              <a:t/>
-            </a:r>
             <a:endParaRPr lang="en-US" dirty="0"/>
           </a:p>
         </p:txBody>
@@ -1301,10 +1046,6 @@
           <a:bodyPr/>
           <a:lstStyle/>
           <a:p>
-            <a:r>
-              <a:rPr lang="en-US" dirty="0"/>
-              <a:t/>
-            </a:r>
             <a:endParaRPr lang="en-US" dirty="0"/>
           </a:p>
         </p:txBody>
@@ -1378,6 +1119,11 @@
 <file path=ppt/slideMasters/slideMaster1.xml><?xml version="1.0" encoding="utf-8"?>
 <p:sldMaster xmlns:a="http://schemas.openxmlformats.org/drawingml/2006/main" xmlns:r="http://schemas.openxmlformats.org/officeDocument/2006/relationships" xmlns:p="http://schemas.openxmlformats.org/presentationml/2006/main">
   <p:cSld>
+    <p:bg>
+      <p:bgRef idx="1001">
+        <a:schemeClr val="bg1"/>
+      </p:bgRef>
+    </p:bg>
     <p:spTree>
       <p:nvGrpSpPr>
         <p:cNvPr id="1" name=""/>
@@ -1392,6 +1138,102 @@
           <a:chExt cx="0" cy="0"/>
         </a:xfrm>
       </p:grpSpPr>
+      <p:sp>
+        <p:nvSpPr>
+          <p:cNvPr id="4" name="TextBox 3">
+            <a:extLst>
+              <a:ext uri="{FF2B5EF4-FFF2-40B4-BE49-F238E27FC236}">
+                <a16:creationId xmlns:a16="http://schemas.microsoft.com/office/drawing/2014/main" id="{7656E46E-815C-560F-3F49-1AC4F1946784}"/>
+              </a:ext>
+            </a:extLst>
+          </p:cNvPr>
+          <p:cNvSpPr txBox="1"/>
+          <p:nvPr userDrawn="1">
+            <p:extLst>
+              <p:ext uri="{1162E1C5-73C7-4A58-AE30-91384D911F3F}">
+                <p184:classification xmlns:p184="http://schemas.microsoft.com/office/powerpoint/2018/4/main" val="hdr"/>
+              </p:ext>
+            </p:extLst>
+          </p:nvPr>
+        </p:nvSpPr>
+        <p:spPr>
+          <a:xfrm>
+            <a:off x="63500" y="63500"/>
+            <a:ext cx="2709863" cy="152400"/>
+          </a:xfrm>
+          <a:prstGeom prst="rect">
+            <a:avLst/>
+          </a:prstGeom>
+        </p:spPr>
+        <p:txBody>
+          <a:bodyPr horzOverflow="overflow" lIns="0" tIns="0" rIns="0" bIns="0">
+            <a:spAutoFit/>
+          </a:bodyPr>
+          <a:lstStyle/>
+          <a:p>
+            <a:pPr algn="l"/>
+            <a:r>
+              <a:rPr lang="en-US" sz="1000">
+                <a:solidFill>
+                  <a:srgbClr val="000000">
+                    <a:alpha val="50000"/>
+                  </a:srgbClr>
+                </a:solidFill>
+                <a:latin typeface="Aptos" panose="020B0004020202020204" pitchFamily="34" charset="0"/>
+              </a:rPr>
+              <a:t>Confidential - Oracle Restricted \Employees Only</a:t>
+            </a:r>
+          </a:p>
+        </p:txBody>
+      </p:sp>
+      <p:sp>
+        <p:nvSpPr>
+          <p:cNvPr id="5" name="TextBox 4">
+            <a:extLst>
+              <a:ext uri="{FF2B5EF4-FFF2-40B4-BE49-F238E27FC236}">
+                <a16:creationId xmlns:a16="http://schemas.microsoft.com/office/drawing/2014/main" id="{67457984-53DA-EE95-E804-4D19BB281259}"/>
+              </a:ext>
+            </a:extLst>
+          </p:cNvPr>
+          <p:cNvSpPr txBox="1"/>
+          <p:nvPr userDrawn="1">
+            <p:extLst>
+              <p:ext uri="{1162E1C5-73C7-4A58-AE30-91384D911F3F}">
+                <p184:classification xmlns:p184="http://schemas.microsoft.com/office/powerpoint/2018/4/main" val="ftr"/>
+              </p:ext>
+            </p:extLst>
+          </p:nvPr>
+        </p:nvSpPr>
+        <p:spPr>
+          <a:xfrm>
+            <a:off x="63500" y="6642100"/>
+            <a:ext cx="2709863" cy="152400"/>
+          </a:xfrm>
+          <a:prstGeom prst="rect">
+            <a:avLst/>
+          </a:prstGeom>
+        </p:spPr>
+        <p:txBody>
+          <a:bodyPr horzOverflow="overflow" lIns="0" tIns="0" rIns="0" bIns="0">
+            <a:spAutoFit/>
+          </a:bodyPr>
+          <a:lstStyle/>
+          <a:p>
+            <a:pPr algn="l"/>
+            <a:r>
+              <a:rPr lang="en-US" sz="1000">
+                <a:solidFill>
+                  <a:srgbClr val="000000">
+                    <a:alpha val="50000"/>
+                  </a:srgbClr>
+                </a:solidFill>
+                <a:latin typeface="Aptos" panose="020B0004020202020204" pitchFamily="34" charset="0"/>
+              </a:rPr>
+              <a:t>Confidential - Oracle Restricted \Employees Only</a:t>
+            </a:r>
+          </a:p>
+        </p:txBody>
+      </p:sp>
     </p:spTree>
   </p:cSld>
   <p:clrMap bg1="lt1" tx1="dk1" bg2="lt2" tx2="dk2" accent1="accent1" accent2="accent2" accent3="accent3" accent4="accent4" accent5="accent5" accent6="accent6" hlink="hlink" folHlink="folHlink"/>
@@ -1660,6 +1502,7 @@
         <a:solidFill>
           <a:srgbClr val="07182D"/>
         </a:solidFill>
+        <a:effectLst/>
       </p:bgPr>
     </p:bg>
     <p:spTree>
@@ -1702,6 +1545,13 @@
             <a:prstDash val="solid"/>
           </a:ln>
         </p:spPr>
+        <p:txBody>
+          <a:bodyPr/>
+          <a:lstStyle/>
+          <a:p>
+            <a:endParaRPr lang="en-US"/>
+          </a:p>
+        </p:txBody>
       </p:sp>
       <p:sp>
         <p:nvSpPr>
@@ -1731,6 +1581,13 @@
             <a:prstDash val="solid"/>
           </a:ln>
         </p:spPr>
+        <p:txBody>
+          <a:bodyPr/>
+          <a:lstStyle/>
+          <a:p>
+            <a:endParaRPr lang="en-US"/>
+          </a:p>
+        </p:txBody>
       </p:sp>
       <p:sp>
         <p:nvSpPr>
@@ -1760,6 +1617,13 @@
             <a:prstDash val="solid"/>
           </a:ln>
         </p:spPr>
+        <p:txBody>
+          <a:bodyPr/>
+          <a:lstStyle/>
+          <a:p>
+            <a:endParaRPr lang="en-US"/>
+          </a:p>
+        </p:txBody>
       </p:sp>
       <p:sp>
         <p:nvSpPr>
@@ -1785,6 +1649,13 @@
             <a:prstDash val="solid"/>
           </a:ln>
         </p:spPr>
+        <p:txBody>
+          <a:bodyPr/>
+          <a:lstStyle/>
+          <a:p>
+            <a:endParaRPr lang="en-US"/>
+          </a:p>
+        </p:txBody>
       </p:sp>
       <p:sp>
         <p:nvSpPr>
@@ -1810,6 +1681,13 @@
             <a:prstDash val="solid"/>
           </a:ln>
         </p:spPr>
+        <p:txBody>
+          <a:bodyPr/>
+          <a:lstStyle/>
+          <a:p>
+            <a:endParaRPr lang="en-US"/>
+          </a:p>
+        </p:txBody>
       </p:sp>
       <p:sp>
         <p:nvSpPr>
@@ -1835,6 +1713,13 @@
             <a:tailEnd type="none"/>
           </a:ln>
         </p:spPr>
+        <p:txBody>
+          <a:bodyPr/>
+          <a:lstStyle/>
+          <a:p>
+            <a:endParaRPr lang="en-US"/>
+          </a:p>
+        </p:txBody>
       </p:sp>
       <p:sp>
         <p:nvSpPr>
@@ -1857,7 +1742,7 @@
           <a:bodyPr wrap="square" rtlCol="0" anchor="ctr"/>
           <a:lstStyle/>
           <a:p>
-            <a:pPr indent="0" marL="0">
+            <a:pPr marL="0" indent="0">
               <a:buNone/>
             </a:pPr>
             <a:r>
@@ -1895,7 +1780,7 @@
           </a:bodyPr>
           <a:lstStyle/>
           <a:p>
-            <a:pPr indent="0" marL="0">
+            <a:pPr marL="0" indent="0">
               <a:buNone/>
             </a:pPr>
             <a:r>
@@ -1909,7 +1794,7 @@
             <a:endParaRPr lang="en-US" sz="4000" dirty="0"/>
           </a:p>
           <a:p>
-            <a:pPr indent="0" marL="0">
+            <a:pPr marL="0" indent="0">
               <a:buNone/>
             </a:pPr>
             <a:r>
@@ -1947,7 +1832,7 @@
           </a:bodyPr>
           <a:lstStyle/>
           <a:p>
-            <a:pPr indent="0" marL="0">
+            <a:pPr marL="0" indent="0">
               <a:buNone/>
             </a:pPr>
             <a:r>
@@ -1988,6 +1873,13 @@
             <a:prstDash val="solid"/>
           </a:ln>
         </p:spPr>
+        <p:txBody>
+          <a:bodyPr/>
+          <a:lstStyle/>
+          <a:p>
+            <a:endParaRPr lang="en-US"/>
+          </a:p>
+        </p:txBody>
       </p:sp>
       <p:sp>
         <p:nvSpPr>
@@ -2010,7 +1902,7 @@
           <a:bodyPr wrap="square" lIns="0" tIns="0" rIns="0" bIns="0" rtlCol="0" anchor="ctr"/>
           <a:lstStyle/>
           <a:p>
-            <a:pPr algn="ctr" indent="0" marL="0">
+            <a:pPr marL="0" indent="0" algn="ctr">
               <a:buNone/>
             </a:pPr>
             <a:r>
@@ -2051,6 +1943,13 @@
             <a:prstDash val="solid"/>
           </a:ln>
         </p:spPr>
+        <p:txBody>
+          <a:bodyPr/>
+          <a:lstStyle/>
+          <a:p>
+            <a:endParaRPr lang="en-US"/>
+          </a:p>
+        </p:txBody>
       </p:sp>
       <p:sp>
         <p:nvSpPr>
@@ -2073,7 +1972,7 @@
           <a:bodyPr wrap="square" lIns="0" tIns="0" rIns="0" bIns="0" rtlCol="0" anchor="ctr"/>
           <a:lstStyle/>
           <a:p>
-            <a:pPr algn="ctr" indent="0" marL="0">
+            <a:pPr marL="0" indent="0" algn="ctr">
               <a:buNone/>
             </a:pPr>
             <a:r>
@@ -2114,6 +2013,13 @@
             <a:prstDash val="solid"/>
           </a:ln>
         </p:spPr>
+        <p:txBody>
+          <a:bodyPr/>
+          <a:lstStyle/>
+          <a:p>
+            <a:endParaRPr lang="en-US"/>
+          </a:p>
+        </p:txBody>
       </p:sp>
       <p:sp>
         <p:nvSpPr>
@@ -2136,7 +2042,7 @@
           <a:bodyPr wrap="square" lIns="0" tIns="0" rIns="0" bIns="0" rtlCol="0" anchor="ctr"/>
           <a:lstStyle/>
           <a:p>
-            <a:pPr algn="ctr" indent="0" marL="0">
+            <a:pPr marL="0" indent="0" algn="ctr">
               <a:buNone/>
             </a:pPr>
             <a:r>
@@ -2181,6 +2087,13 @@
             <a:prstDash val="solid"/>
           </a:ln>
         </p:spPr>
+        <p:txBody>
+          <a:bodyPr/>
+          <a:lstStyle/>
+          <a:p>
+            <a:endParaRPr lang="en-US"/>
+          </a:p>
+        </p:txBody>
       </p:sp>
       <p:sp>
         <p:nvSpPr>
@@ -2203,7 +2116,7 @@
           <a:bodyPr wrap="square" lIns="0" tIns="0" rIns="0" bIns="0" rtlCol="0" anchor="ctr"/>
           <a:lstStyle/>
           <a:p>
-            <a:pPr indent="0" marL="0">
+            <a:pPr marL="0" indent="0">
               <a:buNone/>
             </a:pPr>
             <a:r>
@@ -2241,7 +2154,7 @@
           </a:bodyPr>
           <a:lstStyle/>
           <a:p>
-            <a:pPr indent="0" marL="0">
+            <a:pPr marL="0" indent="0">
               <a:buNone/>
             </a:pPr>
             <a:r>
@@ -2286,6 +2199,13 @@
             <a:prstDash val="solid"/>
           </a:ln>
         </p:spPr>
+        <p:txBody>
+          <a:bodyPr/>
+          <a:lstStyle/>
+          <a:p>
+            <a:endParaRPr lang="en-US"/>
+          </a:p>
+        </p:txBody>
       </p:sp>
       <p:sp>
         <p:nvSpPr>
@@ -2308,7 +2228,7 @@
           <a:bodyPr wrap="square" lIns="0" tIns="0" rIns="0" bIns="0" rtlCol="0" anchor="ctr"/>
           <a:lstStyle/>
           <a:p>
-            <a:pPr indent="0" marL="0">
+            <a:pPr marL="0" indent="0">
               <a:buNone/>
             </a:pPr>
             <a:r>
@@ -2346,7 +2266,7 @@
           </a:bodyPr>
           <a:lstStyle/>
           <a:p>
-            <a:pPr indent="0" marL="0">
+            <a:pPr marL="0" indent="0">
               <a:buNone/>
             </a:pPr>
             <a:r>
@@ -2391,6 +2311,13 @@
             <a:prstDash val="solid"/>
           </a:ln>
         </p:spPr>
+        <p:txBody>
+          <a:bodyPr/>
+          <a:lstStyle/>
+          <a:p>
+            <a:endParaRPr lang="en-US"/>
+          </a:p>
+        </p:txBody>
       </p:sp>
       <p:sp>
         <p:nvSpPr>
@@ -2413,7 +2340,7 @@
           <a:bodyPr wrap="square" lIns="0" tIns="0" rIns="0" bIns="0" rtlCol="0" anchor="ctr"/>
           <a:lstStyle/>
           <a:p>
-            <a:pPr indent="0" marL="0">
+            <a:pPr marL="0" indent="0">
               <a:buNone/>
             </a:pPr>
             <a:r>
@@ -2451,7 +2378,7 @@
           </a:bodyPr>
           <a:lstStyle/>
           <a:p>
-            <a:pPr indent="0" marL="0">
+            <a:pPr marL="0" indent="0">
               <a:buNone/>
             </a:pPr>
             <a:r>
@@ -2487,7 +2414,7 @@
           <a:bodyPr wrap="square" lIns="0" tIns="0" rIns="0" bIns="0" rtlCol="0" anchor="ctr"/>
           <a:lstStyle/>
           <a:p>
-            <a:pPr indent="0" marL="0">
+            <a:pPr marL="0" indent="0">
               <a:buNone/>
             </a:pPr>
             <a:r>
@@ -2511,7 +2438,7 @@
         <p:spPr>
           <a:xfrm>
             <a:off x="7342632" y="566928"/>
-            <a:ext cx="3977640" cy="5413248"/>
+            <a:ext cx="3977640" cy="4889326"/>
           </a:xfrm>
           <a:prstGeom prst="roundRect">
             <a:avLst>
@@ -2530,24 +2457,31 @@
             <a:prstDash val="solid"/>
           </a:ln>
           <a:effectLst>
-            <a:outerShdw sx="100000" sy="100000" kx="0" ky="0" algn="bl" rotWithShape="0" blurRad="25400" dist="50800" dir="2700000">
+            <a:outerShdw blurRad="25400" dist="50800" dir="2700000" algn="bl" rotWithShape="0">
               <a:srgbClr val="000000">
                 <a:alpha val="24000"/>
               </a:srgbClr>
             </a:outerShdw>
           </a:effectLst>
         </p:spPr>
+        <p:txBody>
+          <a:bodyPr/>
+          <a:lstStyle/>
+          <a:p>
+            <a:endParaRPr lang="en-US"/>
+          </a:p>
+        </p:txBody>
       </p:sp>
       <p:pic>
         <p:nvPicPr>
-          <p:cNvPr id="28" name="Image 0" descr="/mnt/data/pro_photo_work/assets/profile-photo-rounded.png">    </p:cNvPr>
+          <p:cNvPr id="28" name="Image 0" descr="/mnt/data/pro_photo_work/assets/profile-photo-rounded.png"/>
           <p:cNvPicPr>
             <a:picLocks noChangeAspect="1"/>
           </p:cNvPicPr>
           <p:nvPr/>
         </p:nvPicPr>
         <p:blipFill>
-          <a:blip r:embed="rId1"/>
+          <a:blip r:embed="rId3"/>
           <a:stretch>
             <a:fillRect/>
           </a:stretch>
@@ -2564,71 +2498,6 @@
       </p:pic>
       <p:sp>
         <p:nvSpPr>
-          <p:cNvPr id="29" name="Shape 26"/>
-          <p:cNvSpPr/>
-          <p:nvPr/>
-        </p:nvSpPr>
-        <p:spPr>
-          <a:xfrm>
-            <a:off x="7662672" y="5413248"/>
-            <a:ext cx="3337560" cy="310896"/>
-          </a:xfrm>
-          <a:prstGeom prst="roundRect">
-            <a:avLst>
-              <a:gd name="adj" fmla="val 35294"/>
-            </a:avLst>
-          </a:prstGeom>
-          <a:solidFill>
-            <a:srgbClr val="F8FAFC"/>
-          </a:solidFill>
-          <a:ln w="12700">
-            <a:solidFill>
-              <a:srgbClr val="DCE5EF">
-                <a:alpha val="80000"/>
-              </a:srgbClr>
-            </a:solidFill>
-            <a:prstDash val="solid"/>
-          </a:ln>
-        </p:spPr>
-      </p:sp>
-      <p:sp>
-        <p:nvSpPr>
-          <p:cNvPr id="30" name="Text 27"/>
-          <p:cNvSpPr/>
-          <p:nvPr/>
-        </p:nvSpPr>
-        <p:spPr>
-          <a:xfrm>
-            <a:off x="7772400" y="5504688"/>
-            <a:ext cx="3108960" cy="109728"/>
-          </a:xfrm>
-          <a:prstGeom prst="rect">
-            <a:avLst/>
-          </a:prstGeom>
-          <a:noFill/>
-          <a:ln/>
-        </p:spPr>
-        <p:txBody>
-          <a:bodyPr wrap="square" lIns="0" tIns="0" rIns="0" bIns="0" rtlCol="0" anchor="ctr"/>
-          <a:lstStyle/>
-          <a:p>
-            <a:pPr algn="ctr" indent="0" marL="0">
-              <a:buNone/>
-            </a:pPr>
-            <a:r>
-              <a:rPr lang="en-US" sz="680" dirty="0">
-                <a:solidFill>
-                  <a:srgbClr val="64748B"/>
-                </a:solidFill>
-              </a:rPr>
-              <a:t>Profile photo included - replace in website assets anytime</a:t>
-            </a:r>
-            <a:endParaRPr lang="en-US" sz="680" dirty="0"/>
-          </a:p>
-        </p:txBody>
-      </p:sp>
-      <p:sp>
-        <p:nvSpPr>
           <p:cNvPr id="31" name="Shape 28"/>
           <p:cNvSpPr/>
           <p:nvPr/>
@@ -2651,6 +2520,13 @@
             <a:prstDash val="solid"/>
           </a:ln>
         </p:spPr>
+        <p:txBody>
+          <a:bodyPr/>
+          <a:lstStyle/>
+          <a:p>
+            <a:endParaRPr lang="en-US"/>
+          </a:p>
+        </p:txBody>
       </p:sp>
       <p:sp>
         <p:nvSpPr>
@@ -2673,7 +2549,7 @@
           <a:bodyPr wrap="square" rtlCol="0" anchor="ctr"/>
           <a:lstStyle/>
           <a:p>
-            <a:pPr indent="0" marL="0">
+            <a:pPr marL="0" indent="0">
               <a:buNone/>
             </a:pPr>
             <a:r>
@@ -2712,7 +2588,7 @@
           <a:bodyPr wrap="square" rtlCol="0" anchor="ctr"/>
           <a:lstStyle/>
           <a:p>
-            <a:pPr algn="r" indent="0" marL="0">
+            <a:pPr marL="0" indent="0" algn="r">
               <a:buNone/>
             </a:pPr>
             <a:r>
@@ -2746,6 +2622,7 @@
         <a:solidFill>
           <a:srgbClr val="07182D"/>
         </a:solidFill>
+        <a:effectLst/>
       </p:bgPr>
     </p:bg>
     <p:spTree>
@@ -2788,6 +2665,13 @@
             <a:prstDash val="solid"/>
           </a:ln>
         </p:spPr>
+        <p:txBody>
+          <a:bodyPr/>
+          <a:lstStyle/>
+          <a:p>
+            <a:endParaRPr lang="en-US"/>
+          </a:p>
+        </p:txBody>
       </p:sp>
       <p:sp>
         <p:nvSpPr>
@@ -2817,6 +2701,13 @@
             <a:prstDash val="solid"/>
           </a:ln>
         </p:spPr>
+        <p:txBody>
+          <a:bodyPr/>
+          <a:lstStyle/>
+          <a:p>
+            <a:endParaRPr lang="en-US"/>
+          </a:p>
+        </p:txBody>
       </p:sp>
       <p:sp>
         <p:nvSpPr>
@@ -2846,6 +2737,13 @@
             <a:prstDash val="solid"/>
           </a:ln>
         </p:spPr>
+        <p:txBody>
+          <a:bodyPr/>
+          <a:lstStyle/>
+          <a:p>
+            <a:endParaRPr lang="en-US"/>
+          </a:p>
+        </p:txBody>
       </p:sp>
       <p:sp>
         <p:nvSpPr>
@@ -2877,24 +2775,31 @@
             <a:prstDash val="solid"/>
           </a:ln>
           <a:effectLst>
-            <a:outerShdw sx="100000" sy="100000" kx="0" ky="0" algn="bl" rotWithShape="0" blurRad="19050" dist="50800" dir="2700000">
+            <a:outerShdw blurRad="19050" dist="50800" dir="2700000" algn="bl" rotWithShape="0">
               <a:srgbClr val="000000">
                 <a:alpha val="20000"/>
               </a:srgbClr>
             </a:outerShdw>
           </a:effectLst>
         </p:spPr>
+        <p:txBody>
+          <a:bodyPr/>
+          <a:lstStyle/>
+          <a:p>
+            <a:endParaRPr lang="en-US"/>
+          </a:p>
+        </p:txBody>
       </p:sp>
       <p:pic>
         <p:nvPicPr>
-          <p:cNvPr id="6" name="Image 0" descr="/mnt/data/pro_photo_work/assets/profile-photo-circle.png">    </p:cNvPr>
+          <p:cNvPr id="6" name="Image 0" descr="/mnt/data/pro_photo_work/assets/profile-photo-circle.png"/>
           <p:cNvPicPr>
             <a:picLocks noChangeAspect="1"/>
           </p:cNvPicPr>
           <p:nvPr/>
         </p:nvPicPr>
         <p:blipFill>
-          <a:blip r:embed="rId1"/>
+          <a:blip r:embed="rId3"/>
           <a:stretch>
             <a:fillRect/>
           </a:stretch>
@@ -2933,6 +2838,13 @@
             <a:tailEnd type="none"/>
           </a:ln>
         </p:spPr>
+        <p:txBody>
+          <a:bodyPr/>
+          <a:lstStyle/>
+          <a:p>
+            <a:endParaRPr lang="en-US"/>
+          </a:p>
+        </p:txBody>
       </p:sp>
       <p:sp>
         <p:nvSpPr>
@@ -2955,7 +2867,7 @@
           <a:bodyPr wrap="square" rtlCol="0" anchor="ctr"/>
           <a:lstStyle/>
           <a:p>
-            <a:pPr indent="0" marL="0">
+            <a:pPr marL="0" indent="0">
               <a:buNone/>
             </a:pPr>
             <a:r>
@@ -2993,7 +2905,7 @@
           </a:bodyPr>
           <a:lstStyle/>
           <a:p>
-            <a:pPr indent="0" marL="0">
+            <a:pPr marL="0" indent="0">
               <a:buNone/>
             </a:pPr>
             <a:r>
@@ -3031,7 +2943,7 @@
           </a:bodyPr>
           <a:lstStyle/>
           <a:p>
-            <a:pPr indent="0" marL="0">
+            <a:pPr marL="0" indent="0">
               <a:buNone/>
             </a:pPr>
             <a:r>
@@ -3072,6 +2984,13 @@
             <a:prstDash val="solid"/>
           </a:ln>
         </p:spPr>
+        <p:txBody>
+          <a:bodyPr/>
+          <a:lstStyle/>
+          <a:p>
+            <a:endParaRPr lang="en-US"/>
+          </a:p>
+        </p:txBody>
       </p:sp>
       <p:sp>
         <p:nvSpPr>
@@ -3094,18 +3013,18 @@
           <a:bodyPr wrap="square" lIns="0" tIns="0" rIns="0" bIns="0" rtlCol="0" anchor="ctr"/>
           <a:lstStyle/>
           <a:p>
-            <a:pPr indent="0" marL="0">
-              <a:buNone/>
-            </a:pPr>
-            <a:r>
-              <a:rPr lang="en-US" sz="840" b="1" dirty="0">
+            <a:pPr marL="0" indent="0">
+              <a:buNone/>
+            </a:pPr>
+            <a:r>
+              <a:rPr lang="en-US" sz="1100" b="1" dirty="0">
                 <a:solidFill>
                   <a:srgbClr val="07182D"/>
                 </a:solidFill>
               </a:rPr>
               <a:t>mohiddinmughal786@gmail.com</a:t>
             </a:r>
-            <a:endParaRPr lang="en-US" sz="840" dirty="0"/>
+            <a:endParaRPr lang="en-US" sz="1100" dirty="0"/>
           </a:p>
         </p:txBody>
       </p:sp>
@@ -3135,6 +3054,13 @@
             <a:prstDash val="solid"/>
           </a:ln>
         </p:spPr>
+        <p:txBody>
+          <a:bodyPr/>
+          <a:lstStyle/>
+          <a:p>
+            <a:endParaRPr lang="en-US"/>
+          </a:p>
+        </p:txBody>
       </p:sp>
       <p:sp>
         <p:nvSpPr>
@@ -3157,18 +3083,18 @@
           <a:bodyPr wrap="square" lIns="0" tIns="0" rIns="0" bIns="0" rtlCol="0" anchor="ctr"/>
           <a:lstStyle/>
           <a:p>
-            <a:pPr algn="ctr" indent="0" marL="0">
-              <a:buNone/>
-            </a:pPr>
-            <a:r>
-              <a:rPr lang="en-US" sz="840" b="1" dirty="0">
+            <a:pPr marL="0" indent="0" algn="ctr">
+              <a:buNone/>
+            </a:pPr>
+            <a:r>
+              <a:rPr lang="en-US" sz="1050" b="1" dirty="0">
                 <a:solidFill>
                   <a:srgbClr val="07182D"/>
                 </a:solidFill>
               </a:rPr>
               <a:t>+91 7330160274</a:t>
             </a:r>
-            <a:endParaRPr lang="en-US" sz="840" dirty="0"/>
+            <a:endParaRPr lang="en-US" sz="1050" dirty="0"/>
           </a:p>
         </p:txBody>
       </p:sp>
@@ -3198,6 +3124,13 @@
             <a:prstDash val="solid"/>
           </a:ln>
         </p:spPr>
+        <p:txBody>
+          <a:bodyPr/>
+          <a:lstStyle/>
+          <a:p>
+            <a:endParaRPr lang="en-US"/>
+          </a:p>
+        </p:txBody>
       </p:sp>
       <p:sp>
         <p:nvSpPr>
@@ -3220,7 +3153,7 @@
           <a:bodyPr wrap="square" lIns="0" tIns="0" rIns="0" bIns="0" rtlCol="0" anchor="ctr"/>
           <a:lstStyle/>
           <a:p>
-            <a:pPr algn="ctr" indent="0" marL="0">
+            <a:pPr marL="0" indent="0" algn="ctr">
               <a:buNone/>
             </a:pPr>
             <a:r>
@@ -3261,6 +3194,13 @@
             <a:prstDash val="solid"/>
           </a:ln>
         </p:spPr>
+        <p:txBody>
+          <a:bodyPr/>
+          <a:lstStyle/>
+          <a:p>
+            <a:endParaRPr lang="en-US"/>
+          </a:p>
+        </p:txBody>
       </p:sp>
       <p:sp>
         <p:nvSpPr>
@@ -3283,7 +3223,7 @@
           <a:bodyPr wrap="square" lIns="0" tIns="0" rIns="0" bIns="0" rtlCol="0" anchor="ctr"/>
           <a:lstStyle/>
           <a:p>
-            <a:pPr algn="ctr" indent="0" marL="0">
+            <a:pPr marL="0" indent="0" algn="ctr">
               <a:buNone/>
             </a:pPr>
             <a:r>
@@ -3324,6 +3264,13 @@
             <a:prstDash val="solid"/>
           </a:ln>
         </p:spPr>
+        <p:txBody>
+          <a:bodyPr/>
+          <a:lstStyle/>
+          <a:p>
+            <a:endParaRPr lang="en-US"/>
+          </a:p>
+        </p:txBody>
       </p:sp>
       <p:sp>
         <p:nvSpPr>
@@ -3346,7 +3293,7 @@
           <a:bodyPr wrap="square" lIns="0" tIns="0" rIns="0" bIns="0" rtlCol="0" anchor="ctr"/>
           <a:lstStyle/>
           <a:p>
-            <a:pPr algn="ctr" indent="0" marL="0">
+            <a:pPr marL="0" indent="0" algn="ctr">
               <a:buNone/>
             </a:pPr>
             <a:r>
@@ -3387,6 +3334,13 @@
             <a:prstDash val="solid"/>
           </a:ln>
         </p:spPr>
+        <p:txBody>
+          <a:bodyPr/>
+          <a:lstStyle/>
+          <a:p>
+            <a:endParaRPr lang="en-US"/>
+          </a:p>
+        </p:txBody>
       </p:sp>
       <p:sp>
         <p:nvSpPr>
@@ -3409,7 +3363,7 @@
           <a:bodyPr wrap="square" lIns="0" tIns="0" rIns="0" bIns="0" rtlCol="0" anchor="ctr"/>
           <a:lstStyle/>
           <a:p>
-            <a:pPr algn="ctr" indent="0" marL="0">
+            <a:pPr marL="0" indent="0" algn="ctr">
               <a:buNone/>
             </a:pPr>
             <a:r>
@@ -3421,42 +3375,6 @@
               <a:t>Agentic AI in OIC</a:t>
             </a:r>
             <a:endParaRPr lang="en-US" sz="720" dirty="0"/>
-          </a:p>
-        </p:txBody>
-      </p:sp>
-      <p:sp>
-        <p:nvSpPr>
-          <p:cNvPr id="23" name="Text 20"/>
-          <p:cNvSpPr/>
-          <p:nvPr/>
-        </p:nvSpPr>
-        <p:spPr>
-          <a:xfrm>
-            <a:off x="1234440" y="4892040"/>
-            <a:ext cx="9326880" cy="201168"/>
-          </a:xfrm>
-          <a:prstGeom prst="rect">
-            <a:avLst/>
-          </a:prstGeom>
-          <a:noFill/>
-          <a:ln/>
-        </p:spPr>
-        <p:txBody>
-          <a:bodyPr wrap="square" lIns="0" tIns="0" rIns="0" bIns="0" rtlCol="0" anchor="ctr"/>
-          <a:lstStyle/>
-          <a:p>
-            <a:pPr algn="ctr" indent="0" marL="0">
-              <a:buNone/>
-            </a:pPr>
-            <a:r>
-              <a:rPr lang="en-US" sz="750" dirty="0">
-                <a:solidFill>
-                  <a:srgbClr val="BBD2E8"/>
-                </a:solidFill>
-              </a:rPr>
-              <a:t>Photo replacement note: In the website folder, replace assets/profile-photo.jpg with your latest image and keep the same filename.</a:t>
-            </a:r>
-            <a:endParaRPr lang="en-US" sz="750" dirty="0"/>
           </a:p>
         </p:txBody>
       </p:sp>
@@ -3484,6 +3402,13 @@
             <a:prstDash val="solid"/>
           </a:ln>
         </p:spPr>
+        <p:txBody>
+          <a:bodyPr/>
+          <a:lstStyle/>
+          <a:p>
+            <a:endParaRPr lang="en-US"/>
+          </a:p>
+        </p:txBody>
       </p:sp>
       <p:sp>
         <p:nvSpPr>
@@ -3506,7 +3431,7 @@
           <a:bodyPr wrap="square" rtlCol="0" anchor="ctr"/>
           <a:lstStyle/>
           <a:p>
-            <a:pPr indent="0" marL="0">
+            <a:pPr marL="0" indent="0">
               <a:buNone/>
             </a:pPr>
             <a:r>
@@ -3545,7 +3470,7 @@
           <a:bodyPr wrap="square" rtlCol="0" anchor="ctr"/>
           <a:lstStyle/>
           <a:p>
-            <a:pPr algn="r" indent="0" marL="0">
+            <a:pPr marL="0" indent="0" algn="r">
               <a:buNone/>
             </a:pPr>
             <a:r>
@@ -3579,6 +3504,7 @@
         <a:solidFill>
           <a:srgbClr val="FBFCFE"/>
         </a:solidFill>
+        <a:effectLst/>
       </p:bgPr>
     </p:bg>
     <p:spTree>
@@ -3623,6 +3549,13 @@
             <a:prstDash val="solid"/>
           </a:ln>
         </p:spPr>
+        <p:txBody>
+          <a:bodyPr/>
+          <a:lstStyle/>
+          <a:p>
+            <a:endParaRPr lang="en-US"/>
+          </a:p>
+        </p:txBody>
       </p:sp>
       <p:sp>
         <p:nvSpPr>
@@ -3652,6 +3585,13 @@
             <a:prstDash val="solid"/>
           </a:ln>
         </p:spPr>
+        <p:txBody>
+          <a:bodyPr/>
+          <a:lstStyle/>
+          <a:p>
+            <a:endParaRPr lang="en-US"/>
+          </a:p>
+        </p:txBody>
       </p:sp>
       <p:sp>
         <p:nvSpPr>
@@ -3679,6 +3619,13 @@
             <a:prstDash val="solid"/>
           </a:ln>
         </p:spPr>
+        <p:txBody>
+          <a:bodyPr/>
+          <a:lstStyle/>
+          <a:p>
+            <a:endParaRPr lang="en-US"/>
+          </a:p>
+        </p:txBody>
       </p:sp>
       <p:sp>
         <p:nvSpPr>
@@ -3704,6 +3651,13 @@
             <a:tailEnd type="none"/>
           </a:ln>
         </p:spPr>
+        <p:txBody>
+          <a:bodyPr/>
+          <a:lstStyle/>
+          <a:p>
+            <a:endParaRPr lang="en-US"/>
+          </a:p>
+        </p:txBody>
       </p:sp>
       <p:sp>
         <p:nvSpPr>
@@ -3726,7 +3680,7 @@
           <a:bodyPr wrap="square" rtlCol="0" anchor="ctr"/>
           <a:lstStyle/>
           <a:p>
-            <a:pPr indent="0" marL="0">
+            <a:pPr marL="0" indent="0">
               <a:buNone/>
             </a:pPr>
             <a:r>
@@ -3762,7 +3716,7 @@
           <a:bodyPr wrap="square" lIns="0" tIns="0" rIns="0" bIns="0" rtlCol="0" anchor="ctr"/>
           <a:lstStyle/>
           <a:p>
-            <a:pPr indent="0" marL="0">
+            <a:pPr marL="0" indent="0">
               <a:buNone/>
             </a:pPr>
             <a:r>
@@ -3798,7 +3752,7 @@
           <a:bodyPr wrap="square" lIns="0" tIns="0" rIns="0" bIns="0" rtlCol="0" anchor="ctr"/>
           <a:lstStyle/>
           <a:p>
-            <a:pPr indent="0" marL="0">
+            <a:pPr marL="0" indent="0">
               <a:buNone/>
             </a:pPr>
             <a:r>
@@ -3835,6 +3789,13 @@
             <a:prstDash val="solid"/>
           </a:ln>
         </p:spPr>
+        <p:txBody>
+          <a:bodyPr/>
+          <a:lstStyle/>
+          <a:p>
+            <a:endParaRPr lang="en-US"/>
+          </a:p>
+        </p:txBody>
       </p:sp>
       <p:sp>
         <p:nvSpPr>
@@ -3857,7 +3818,7 @@
           <a:bodyPr wrap="square" rtlCol="0" anchor="ctr"/>
           <a:lstStyle/>
           <a:p>
-            <a:pPr indent="0" marL="0">
+            <a:pPr marL="0" indent="0">
               <a:buNone/>
             </a:pPr>
             <a:r>
@@ -3896,7 +3857,7 @@
           <a:bodyPr wrap="square" rtlCol="0" anchor="ctr"/>
           <a:lstStyle/>
           <a:p>
-            <a:pPr algn="r" indent="0" marL="0">
+            <a:pPr marL="0" indent="0" algn="r">
               <a:buNone/>
             </a:pPr>
             <a:r>
@@ -3940,24 +3901,31 @@
             <a:prstDash val="solid"/>
           </a:ln>
           <a:effectLst>
-            <a:outerShdw sx="100000" sy="100000" kx="0" ky="0" algn="bl" rotWithShape="0" blurRad="19050" dist="50800" dir="2700000">
+            <a:outerShdw blurRad="19050" dist="50800" dir="2700000" algn="bl" rotWithShape="0">
               <a:srgbClr val="000000">
                 <a:alpha val="9000"/>
               </a:srgbClr>
             </a:outerShdw>
           </a:effectLst>
         </p:spPr>
+        <p:txBody>
+          <a:bodyPr/>
+          <a:lstStyle/>
+          <a:p>
+            <a:endParaRPr lang="en-US"/>
+          </a:p>
+        </p:txBody>
       </p:sp>
       <p:pic>
         <p:nvPicPr>
-          <p:cNvPr id="13" name="Image 0" descr="/mnt/data/pro_photo_work/assets/profile-photo-circle.png">    </p:cNvPr>
+          <p:cNvPr id="13" name="Image 0" descr="/mnt/data/pro_photo_work/assets/profile-photo-circle.png"/>
           <p:cNvPicPr>
             <a:picLocks noChangeAspect="1"/>
           </p:cNvPicPr>
           <p:nvPr/>
         </p:nvPicPr>
         <p:blipFill>
-          <a:blip r:embed="rId1"/>
+          <a:blip r:embed="rId3"/>
           <a:stretch>
             <a:fillRect/>
           </a:stretch>
@@ -3993,7 +3961,7 @@
           <a:bodyPr wrap="square" lIns="0" tIns="0" rIns="0" bIns="0" rtlCol="0" anchor="ctr"/>
           <a:lstStyle/>
           <a:p>
-            <a:pPr algn="ctr" indent="0" marL="0">
+            <a:pPr marL="0" indent="0" algn="ctr">
               <a:buNone/>
             </a:pPr>
             <a:r>
@@ -4029,7 +3997,7 @@
           <a:bodyPr wrap="square" lIns="0" tIns="0" rIns="0" bIns="0" rtlCol="0" anchor="ctr"/>
           <a:lstStyle/>
           <a:p>
-            <a:pPr algn="ctr" indent="0" marL="0">
+            <a:pPr marL="0" indent="0" algn="ctr">
               <a:buNone/>
             </a:pPr>
             <a:r>
@@ -4067,7 +4035,7 @@
           </a:bodyPr>
           <a:lstStyle/>
           <a:p>
-            <a:pPr algn="ctr" indent="0" marL="0">
+            <a:pPr marL="0" indent="0" algn="ctr">
               <a:buNone/>
             </a:pPr>
             <a:r>
@@ -4090,7 +4058,7 @@
         </p:nvSpPr>
         <p:spPr>
           <a:xfrm>
-            <a:off x="914400" y="5513832"/>
+            <a:off x="1289304" y="5477256"/>
             <a:ext cx="685800" cy="292608"/>
           </a:xfrm>
           <a:prstGeom prst="roundRect">
@@ -4108,6 +4076,13 @@
             <a:prstDash val="solid"/>
           </a:ln>
         </p:spPr>
+        <p:txBody>
+          <a:bodyPr/>
+          <a:lstStyle/>
+          <a:p>
+            <a:endParaRPr lang="en-US"/>
+          </a:p>
+        </p:txBody>
       </p:sp>
       <p:sp>
         <p:nvSpPr>
@@ -4117,7 +4092,7 @@
         </p:nvSpPr>
         <p:spPr>
           <a:xfrm>
-            <a:off x="1024128" y="5586984"/>
+            <a:off x="1399032" y="5550408"/>
             <a:ext cx="466344" cy="109728"/>
           </a:xfrm>
           <a:prstGeom prst="rect">
@@ -4130,7 +4105,7 @@
           <a:bodyPr wrap="square" lIns="0" tIns="0" rIns="0" bIns="0" rtlCol="0" anchor="ctr"/>
           <a:lstStyle/>
           <a:p>
-            <a:pPr algn="ctr" indent="0" marL="0">
+            <a:pPr marL="0" indent="0" algn="ctr">
               <a:buNone/>
             </a:pPr>
             <a:r>
@@ -4153,7 +4128,7 @@
         </p:nvSpPr>
         <p:spPr>
           <a:xfrm>
-            <a:off x="1682496" y="5513832"/>
+            <a:off x="2057400" y="5477256"/>
             <a:ext cx="777240" cy="292608"/>
           </a:xfrm>
           <a:prstGeom prst="roundRect">
@@ -4171,6 +4146,13 @@
             <a:prstDash val="solid"/>
           </a:ln>
         </p:spPr>
+        <p:txBody>
+          <a:bodyPr/>
+          <a:lstStyle/>
+          <a:p>
+            <a:endParaRPr lang="en-US"/>
+          </a:p>
+        </p:txBody>
       </p:sp>
       <p:sp>
         <p:nvSpPr>
@@ -4180,7 +4162,7 @@
         </p:nvSpPr>
         <p:spPr>
           <a:xfrm>
-            <a:off x="1792224" y="5586984"/>
+            <a:off x="2167128" y="5550408"/>
             <a:ext cx="557784" cy="109728"/>
           </a:xfrm>
           <a:prstGeom prst="rect">
@@ -4193,7 +4175,7 @@
           <a:bodyPr wrap="square" lIns="0" tIns="0" rIns="0" bIns="0" rtlCol="0" anchor="ctr"/>
           <a:lstStyle/>
           <a:p>
-            <a:pPr algn="ctr" indent="0" marL="0">
+            <a:pPr marL="0" indent="0" algn="ctr">
               <a:buNone/>
             </a:pPr>
             <a:r>
@@ -4203,69 +4185,6 @@
                 </a:solidFill>
               </a:rPr>
               <a:t>INFOLOB</a:t>
-            </a:r>
-            <a:endParaRPr lang="en-US" sz="720" dirty="0"/>
-          </a:p>
-        </p:txBody>
-      </p:sp>
-      <p:sp>
-        <p:nvSpPr>
-          <p:cNvPr id="21" name="Shape 18"/>
-          <p:cNvSpPr/>
-          <p:nvPr/>
-        </p:nvSpPr>
-        <p:spPr>
-          <a:xfrm>
-            <a:off x="2551176" y="5513832"/>
-            <a:ext cx="713232" cy="292608"/>
-          </a:xfrm>
-          <a:prstGeom prst="roundRect">
-            <a:avLst>
-              <a:gd name="adj" fmla="val 31250"/>
-            </a:avLst>
-          </a:prstGeom>
-          <a:solidFill>
-            <a:srgbClr val="FFF4D6"/>
-          </a:solidFill>
-          <a:ln w="8890">
-            <a:solidFill>
-              <a:srgbClr val="F1D998"/>
-            </a:solidFill>
-            <a:prstDash val="solid"/>
-          </a:ln>
-        </p:spPr>
-      </p:sp>
-      <p:sp>
-        <p:nvSpPr>
-          <p:cNvPr id="22" name="Text 19"/>
-          <p:cNvSpPr/>
-          <p:nvPr/>
-        </p:nvSpPr>
-        <p:spPr>
-          <a:xfrm>
-            <a:off x="2660904" y="5586984"/>
-            <a:ext cx="493776" cy="109728"/>
-          </a:xfrm>
-          <a:prstGeom prst="rect">
-            <a:avLst/>
-          </a:prstGeom>
-          <a:noFill/>
-          <a:ln/>
-        </p:spPr>
-        <p:txBody>
-          <a:bodyPr wrap="square" lIns="0" tIns="0" rIns="0" bIns="0" rtlCol="0" anchor="ctr"/>
-          <a:lstStyle/>
-          <a:p>
-            <a:pPr algn="ctr" indent="0" marL="0">
-              <a:buNone/>
-            </a:pPr>
-            <a:r>
-              <a:rPr lang="en-US" sz="720" b="1" dirty="0">
-                <a:solidFill>
-                  <a:srgbClr val="D99A16"/>
-                </a:solidFill>
-              </a:rPr>
-              <a:t>Etisalat</a:t>
             </a:r>
             <a:endParaRPr lang="en-US" sz="720" dirty="0"/>
           </a:p>
@@ -4297,13 +4216,20 @@
             <a:prstDash val="solid"/>
           </a:ln>
           <a:effectLst>
-            <a:outerShdw sx="100000" sy="100000" kx="0" ky="0" algn="bl" rotWithShape="0" blurRad="12700" dist="50800" dir="2700000">
+            <a:outerShdw blurRad="12700" dist="50800" dir="2700000" algn="bl" rotWithShape="0">
               <a:srgbClr val="000000">
                 <a:alpha val="7000"/>
               </a:srgbClr>
             </a:outerShdw>
           </a:effectLst>
         </p:spPr>
+        <p:txBody>
+          <a:bodyPr/>
+          <a:lstStyle/>
+          <a:p>
+            <a:endParaRPr lang="en-US"/>
+          </a:p>
+        </p:txBody>
       </p:sp>
       <p:sp>
         <p:nvSpPr>
@@ -4331,6 +4257,13 @@
             <a:prstDash val="solid"/>
           </a:ln>
         </p:spPr>
+        <p:txBody>
+          <a:bodyPr/>
+          <a:lstStyle/>
+          <a:p>
+            <a:endParaRPr lang="en-US"/>
+          </a:p>
+        </p:txBody>
       </p:sp>
       <p:sp>
         <p:nvSpPr>
@@ -4353,7 +4286,7 @@
           <a:bodyPr wrap="square" lIns="0" tIns="0" rIns="0" bIns="0" rtlCol="0" anchor="ctr"/>
           <a:lstStyle/>
           <a:p>
-            <a:pPr algn="ctr" indent="0" marL="0">
+            <a:pPr marL="0" indent="0" algn="ctr">
               <a:buNone/>
             </a:pPr>
             <a:r>
@@ -4389,7 +4322,7 @@
           <a:bodyPr wrap="square" lIns="0" tIns="0" rIns="0" bIns="0" rtlCol="0" anchor="ctr"/>
           <a:lstStyle/>
           <a:p>
-            <a:pPr indent="0" marL="0">
+            <a:pPr marL="0" indent="0">
               <a:buNone/>
             </a:pPr>
             <a:r>
@@ -4427,7 +4360,7 @@
           </a:bodyPr>
           <a:lstStyle/>
           <a:p>
-            <a:pPr indent="0" marL="0">
+            <a:pPr marL="0" indent="0">
               <a:buNone/>
             </a:pPr>
             <a:r>
@@ -4468,13 +4401,20 @@
             <a:prstDash val="solid"/>
           </a:ln>
           <a:effectLst>
-            <a:outerShdw sx="100000" sy="100000" kx="0" ky="0" algn="bl" rotWithShape="0" blurRad="12700" dist="50800" dir="2700000">
+            <a:outerShdw blurRad="12700" dist="50800" dir="2700000" algn="bl" rotWithShape="0">
               <a:srgbClr val="000000">
                 <a:alpha val="7000"/>
               </a:srgbClr>
             </a:outerShdw>
           </a:effectLst>
         </p:spPr>
+        <p:txBody>
+          <a:bodyPr/>
+          <a:lstStyle/>
+          <a:p>
+            <a:endParaRPr lang="en-US"/>
+          </a:p>
+        </p:txBody>
       </p:sp>
       <p:sp>
         <p:nvSpPr>
@@ -4502,6 +4442,13 @@
             <a:prstDash val="solid"/>
           </a:ln>
         </p:spPr>
+        <p:txBody>
+          <a:bodyPr/>
+          <a:lstStyle/>
+          <a:p>
+            <a:endParaRPr lang="en-US"/>
+          </a:p>
+        </p:txBody>
       </p:sp>
       <p:sp>
         <p:nvSpPr>
@@ -4524,7 +4471,7 @@
           <a:bodyPr wrap="square" lIns="0" tIns="0" rIns="0" bIns="0" rtlCol="0" anchor="ctr"/>
           <a:lstStyle/>
           <a:p>
-            <a:pPr algn="ctr" indent="0" marL="0">
+            <a:pPr marL="0" indent="0" algn="ctr">
               <a:buNone/>
             </a:pPr>
             <a:r>
@@ -4560,7 +4507,7 @@
           <a:bodyPr wrap="square" lIns="0" tIns="0" rIns="0" bIns="0" rtlCol="0" anchor="ctr"/>
           <a:lstStyle/>
           <a:p>
-            <a:pPr indent="0" marL="0">
+            <a:pPr marL="0" indent="0">
               <a:buNone/>
             </a:pPr>
             <a:r>
@@ -4598,7 +4545,7 @@
           </a:bodyPr>
           <a:lstStyle/>
           <a:p>
-            <a:pPr indent="0" marL="0">
+            <a:pPr marL="0" indent="0">
               <a:buNone/>
             </a:pPr>
             <a:r>
@@ -4639,13 +4586,20 @@
             <a:prstDash val="solid"/>
           </a:ln>
           <a:effectLst>
-            <a:outerShdw sx="100000" sy="100000" kx="0" ky="0" algn="bl" rotWithShape="0" blurRad="12700" dist="50800" dir="2700000">
+            <a:outerShdw blurRad="12700" dist="50800" dir="2700000" algn="bl" rotWithShape="0">
               <a:srgbClr val="000000">
                 <a:alpha val="7000"/>
               </a:srgbClr>
             </a:outerShdw>
           </a:effectLst>
         </p:spPr>
+        <p:txBody>
+          <a:bodyPr/>
+          <a:lstStyle/>
+          <a:p>
+            <a:endParaRPr lang="en-US"/>
+          </a:p>
+        </p:txBody>
       </p:sp>
       <p:sp>
         <p:nvSpPr>
@@ -4673,6 +4627,13 @@
             <a:prstDash val="solid"/>
           </a:ln>
         </p:spPr>
+        <p:txBody>
+          <a:bodyPr/>
+          <a:lstStyle/>
+          <a:p>
+            <a:endParaRPr lang="en-US"/>
+          </a:p>
+        </p:txBody>
       </p:sp>
       <p:sp>
         <p:nvSpPr>
@@ -4695,7 +4656,7 @@
           <a:bodyPr wrap="square" lIns="0" tIns="0" rIns="0" bIns="0" rtlCol="0" anchor="ctr"/>
           <a:lstStyle/>
           <a:p>
-            <a:pPr algn="ctr" indent="0" marL="0">
+            <a:pPr marL="0" indent="0" algn="ctr">
               <a:buNone/>
             </a:pPr>
             <a:r>
@@ -4731,7 +4692,7 @@
           <a:bodyPr wrap="square" lIns="0" tIns="0" rIns="0" bIns="0" rtlCol="0" anchor="ctr"/>
           <a:lstStyle/>
           <a:p>
-            <a:pPr indent="0" marL="0">
+            <a:pPr marL="0" indent="0">
               <a:buNone/>
             </a:pPr>
             <a:r>
@@ -4769,7 +4730,7 @@
           </a:bodyPr>
           <a:lstStyle/>
           <a:p>
-            <a:pPr indent="0" marL="0">
+            <a:pPr marL="0" indent="0">
               <a:buNone/>
             </a:pPr>
             <a:r>
@@ -4810,13 +4771,20 @@
             <a:prstDash val="solid"/>
           </a:ln>
           <a:effectLst>
-            <a:outerShdw sx="100000" sy="100000" kx="0" ky="0" algn="bl" rotWithShape="0" blurRad="12700" dist="50800" dir="2700000">
+            <a:outerShdw blurRad="12700" dist="50800" dir="2700000" algn="bl" rotWithShape="0">
               <a:srgbClr val="000000">
                 <a:alpha val="7000"/>
               </a:srgbClr>
             </a:outerShdw>
           </a:effectLst>
         </p:spPr>
+        <p:txBody>
+          <a:bodyPr/>
+          <a:lstStyle/>
+          <a:p>
+            <a:endParaRPr lang="en-US"/>
+          </a:p>
+        </p:txBody>
       </p:sp>
       <p:sp>
         <p:nvSpPr>
@@ -4844,6 +4812,13 @@
             <a:prstDash val="solid"/>
           </a:ln>
         </p:spPr>
+        <p:txBody>
+          <a:bodyPr/>
+          <a:lstStyle/>
+          <a:p>
+            <a:endParaRPr lang="en-US"/>
+          </a:p>
+        </p:txBody>
       </p:sp>
       <p:sp>
         <p:nvSpPr>
@@ -4866,7 +4841,7 @@
           <a:bodyPr wrap="square" lIns="0" tIns="0" rIns="0" bIns="0" rtlCol="0" anchor="ctr"/>
           <a:lstStyle/>
           <a:p>
-            <a:pPr algn="ctr" indent="0" marL="0">
+            <a:pPr marL="0" indent="0" algn="ctr">
               <a:buNone/>
             </a:pPr>
             <a:r>
@@ -4902,7 +4877,7 @@
           <a:bodyPr wrap="square" lIns="0" tIns="0" rIns="0" bIns="0" rtlCol="0" anchor="ctr"/>
           <a:lstStyle/>
           <a:p>
-            <a:pPr indent="0" marL="0">
+            <a:pPr marL="0" indent="0">
               <a:buNone/>
             </a:pPr>
             <a:r>
@@ -4940,7 +4915,7 @@
           </a:bodyPr>
           <a:lstStyle/>
           <a:p>
-            <a:pPr indent="0" marL="0">
+            <a:pPr marL="0" indent="0">
               <a:buNone/>
             </a:pPr>
             <a:r>
@@ -4971,6 +4946,7 @@
         <a:solidFill>
           <a:srgbClr val="FBFCFE"/>
         </a:solidFill>
+        <a:effectLst/>
       </p:bgPr>
     </p:bg>
     <p:spTree>
@@ -5015,6 +4991,13 @@
             <a:prstDash val="solid"/>
           </a:ln>
         </p:spPr>
+        <p:txBody>
+          <a:bodyPr/>
+          <a:lstStyle/>
+          <a:p>
+            <a:endParaRPr lang="en-US"/>
+          </a:p>
+        </p:txBody>
       </p:sp>
       <p:sp>
         <p:nvSpPr>
@@ -5044,6 +5027,13 @@
             <a:prstDash val="solid"/>
           </a:ln>
         </p:spPr>
+        <p:txBody>
+          <a:bodyPr/>
+          <a:lstStyle/>
+          <a:p>
+            <a:endParaRPr lang="en-US"/>
+          </a:p>
+        </p:txBody>
       </p:sp>
       <p:sp>
         <p:nvSpPr>
@@ -5071,6 +5061,13 @@
             <a:prstDash val="solid"/>
           </a:ln>
         </p:spPr>
+        <p:txBody>
+          <a:bodyPr/>
+          <a:lstStyle/>
+          <a:p>
+            <a:endParaRPr lang="en-US"/>
+          </a:p>
+        </p:txBody>
       </p:sp>
       <p:sp>
         <p:nvSpPr>
@@ -5096,6 +5093,13 @@
             <a:tailEnd type="none"/>
           </a:ln>
         </p:spPr>
+        <p:txBody>
+          <a:bodyPr/>
+          <a:lstStyle/>
+          <a:p>
+            <a:endParaRPr lang="en-US"/>
+          </a:p>
+        </p:txBody>
       </p:sp>
       <p:sp>
         <p:nvSpPr>
@@ -5118,7 +5122,7 @@
           <a:bodyPr wrap="square" rtlCol="0" anchor="ctr"/>
           <a:lstStyle/>
           <a:p>
-            <a:pPr indent="0" marL="0">
+            <a:pPr marL="0" indent="0">
               <a:buNone/>
             </a:pPr>
             <a:r>
@@ -5154,7 +5158,7 @@
           <a:bodyPr wrap="square" lIns="0" tIns="0" rIns="0" bIns="0" rtlCol="0" anchor="ctr"/>
           <a:lstStyle/>
           <a:p>
-            <a:pPr indent="0" marL="0">
+            <a:pPr marL="0" indent="0">
               <a:buNone/>
             </a:pPr>
             <a:r>
@@ -5190,7 +5194,7 @@
           <a:bodyPr wrap="square" lIns="0" tIns="0" rIns="0" bIns="0" rtlCol="0" anchor="ctr"/>
           <a:lstStyle/>
           <a:p>
-            <a:pPr indent="0" marL="0">
+            <a:pPr marL="0" indent="0">
               <a:buNone/>
             </a:pPr>
             <a:r>
@@ -5227,6 +5231,13 @@
             <a:prstDash val="solid"/>
           </a:ln>
         </p:spPr>
+        <p:txBody>
+          <a:bodyPr/>
+          <a:lstStyle/>
+          <a:p>
+            <a:endParaRPr lang="en-US"/>
+          </a:p>
+        </p:txBody>
       </p:sp>
       <p:sp>
         <p:nvSpPr>
@@ -5249,7 +5260,7 @@
           <a:bodyPr wrap="square" rtlCol="0" anchor="ctr"/>
           <a:lstStyle/>
           <a:p>
-            <a:pPr indent="0" marL="0">
+            <a:pPr marL="0" indent="0">
               <a:buNone/>
             </a:pPr>
             <a:r>
@@ -5288,7 +5299,7 @@
           <a:bodyPr wrap="square" rtlCol="0" anchor="ctr"/>
           <a:lstStyle/>
           <a:p>
-            <a:pPr algn="r" indent="0" marL="0">
+            <a:pPr marL="0" indent="0" algn="r">
               <a:buNone/>
             </a:pPr>
             <a:r>
@@ -5332,13 +5343,20 @@
             <a:prstDash val="solid"/>
           </a:ln>
           <a:effectLst>
-            <a:outerShdw sx="100000" sy="100000" kx="0" ky="0" algn="bl" rotWithShape="0" blurRad="19050" dist="50800" dir="2700000">
+            <a:outerShdw blurRad="19050" dist="50800" dir="2700000" algn="bl" rotWithShape="0">
               <a:srgbClr val="000000">
                 <a:alpha val="10000"/>
               </a:srgbClr>
             </a:outerShdw>
           </a:effectLst>
         </p:spPr>
+        <p:txBody>
+          <a:bodyPr/>
+          <a:lstStyle/>
+          <a:p>
+            <a:endParaRPr lang="en-US"/>
+          </a:p>
+        </p:txBody>
       </p:sp>
       <p:sp>
         <p:nvSpPr>
@@ -5366,6 +5384,13 @@
             <a:prstDash val="solid"/>
           </a:ln>
         </p:spPr>
+        <p:txBody>
+          <a:bodyPr/>
+          <a:lstStyle/>
+          <a:p>
+            <a:endParaRPr lang="en-US"/>
+          </a:p>
+        </p:txBody>
       </p:sp>
       <p:sp>
         <p:nvSpPr>
@@ -5388,7 +5413,7 @@
           <a:bodyPr wrap="square" lIns="0" tIns="0" rIns="0" bIns="0" rtlCol="0" anchor="ctr"/>
           <a:lstStyle/>
           <a:p>
-            <a:pPr indent="0" marL="0">
+            <a:pPr marL="0" indent="0">
               <a:buNone/>
             </a:pPr>
             <a:r>
@@ -5426,7 +5451,7 @@
           </a:bodyPr>
           <a:lstStyle/>
           <a:p>
-            <a:pPr indent="0" marL="0">
+            <a:pPr marL="0" indent="0">
               <a:buNone/>
             </a:pPr>
             <a:r>
@@ -5467,13 +5492,20 @@
             <a:prstDash val="solid"/>
           </a:ln>
           <a:effectLst>
-            <a:outerShdw sx="100000" sy="100000" kx="0" ky="0" algn="bl" rotWithShape="0" blurRad="19050" dist="50800" dir="2700000">
+            <a:outerShdw blurRad="19050" dist="50800" dir="2700000" algn="bl" rotWithShape="0">
               <a:srgbClr val="000000">
                 <a:alpha val="10000"/>
               </a:srgbClr>
             </a:outerShdw>
           </a:effectLst>
         </p:spPr>
+        <p:txBody>
+          <a:bodyPr/>
+          <a:lstStyle/>
+          <a:p>
+            <a:endParaRPr lang="en-US"/>
+          </a:p>
+        </p:txBody>
       </p:sp>
       <p:sp>
         <p:nvSpPr>
@@ -5501,6 +5533,13 @@
             <a:prstDash val="solid"/>
           </a:ln>
         </p:spPr>
+        <p:txBody>
+          <a:bodyPr/>
+          <a:lstStyle/>
+          <a:p>
+            <a:endParaRPr lang="en-US"/>
+          </a:p>
+        </p:txBody>
       </p:sp>
       <p:sp>
         <p:nvSpPr>
@@ -5523,7 +5562,7 @@
           <a:bodyPr wrap="square" lIns="0" tIns="0" rIns="0" bIns="0" rtlCol="0" anchor="ctr"/>
           <a:lstStyle/>
           <a:p>
-            <a:pPr indent="0" marL="0">
+            <a:pPr marL="0" indent="0">
               <a:buNone/>
             </a:pPr>
             <a:r>
@@ -5561,7 +5600,7 @@
           </a:bodyPr>
           <a:lstStyle/>
           <a:p>
-            <a:pPr indent="0" marL="0">
+            <a:pPr marL="0" indent="0">
               <a:buNone/>
             </a:pPr>
             <a:r>
@@ -5602,13 +5641,20 @@
             <a:prstDash val="solid"/>
           </a:ln>
           <a:effectLst>
-            <a:outerShdw sx="100000" sy="100000" kx="0" ky="0" algn="bl" rotWithShape="0" blurRad="19050" dist="50800" dir="2700000">
+            <a:outerShdw blurRad="19050" dist="50800" dir="2700000" algn="bl" rotWithShape="0">
               <a:srgbClr val="000000">
                 <a:alpha val="10000"/>
               </a:srgbClr>
             </a:outerShdw>
           </a:effectLst>
         </p:spPr>
+        <p:txBody>
+          <a:bodyPr/>
+          <a:lstStyle/>
+          <a:p>
+            <a:endParaRPr lang="en-US"/>
+          </a:p>
+        </p:txBody>
       </p:sp>
       <p:sp>
         <p:nvSpPr>
@@ -5636,6 +5682,13 @@
             <a:prstDash val="solid"/>
           </a:ln>
         </p:spPr>
+        <p:txBody>
+          <a:bodyPr/>
+          <a:lstStyle/>
+          <a:p>
+            <a:endParaRPr lang="en-US"/>
+          </a:p>
+        </p:txBody>
       </p:sp>
       <p:sp>
         <p:nvSpPr>
@@ -5658,7 +5711,7 @@
           <a:bodyPr wrap="square" lIns="0" tIns="0" rIns="0" bIns="0" rtlCol="0" anchor="ctr"/>
           <a:lstStyle/>
           <a:p>
-            <a:pPr indent="0" marL="0">
+            <a:pPr marL="0" indent="0">
               <a:buNone/>
             </a:pPr>
             <a:r>
@@ -5696,7 +5749,7 @@
           </a:bodyPr>
           <a:lstStyle/>
           <a:p>
-            <a:pPr indent="0" marL="0">
+            <a:pPr marL="0" indent="0">
               <a:buNone/>
             </a:pPr>
             <a:r>
@@ -5737,13 +5790,20 @@
             <a:prstDash val="solid"/>
           </a:ln>
           <a:effectLst>
-            <a:outerShdw sx="100000" sy="100000" kx="0" ky="0" algn="bl" rotWithShape="0" blurRad="19050" dist="50800" dir="2700000">
+            <a:outerShdw blurRad="19050" dist="50800" dir="2700000" algn="bl" rotWithShape="0">
               <a:srgbClr val="000000">
                 <a:alpha val="10000"/>
               </a:srgbClr>
             </a:outerShdw>
           </a:effectLst>
         </p:spPr>
+        <p:txBody>
+          <a:bodyPr/>
+          <a:lstStyle/>
+          <a:p>
+            <a:endParaRPr lang="en-US"/>
+          </a:p>
+        </p:txBody>
       </p:sp>
       <p:sp>
         <p:nvSpPr>
@@ -5771,6 +5831,13 @@
             <a:prstDash val="solid"/>
           </a:ln>
         </p:spPr>
+        <p:txBody>
+          <a:bodyPr/>
+          <a:lstStyle/>
+          <a:p>
+            <a:endParaRPr lang="en-US"/>
+          </a:p>
+        </p:txBody>
       </p:sp>
       <p:sp>
         <p:nvSpPr>
@@ -5793,7 +5860,7 @@
           <a:bodyPr wrap="square" lIns="0" tIns="0" rIns="0" bIns="0" rtlCol="0" anchor="ctr"/>
           <a:lstStyle/>
           <a:p>
-            <a:pPr indent="0" marL="0">
+            <a:pPr marL="0" indent="0">
               <a:buNone/>
             </a:pPr>
             <a:r>
@@ -5831,7 +5898,7 @@
           </a:bodyPr>
           <a:lstStyle/>
           <a:p>
-            <a:pPr indent="0" marL="0">
+            <a:pPr marL="0" indent="0">
               <a:buNone/>
             </a:pPr>
             <a:r>
@@ -5872,13 +5939,20 @@
             <a:prstDash val="solid"/>
           </a:ln>
           <a:effectLst>
-            <a:outerShdw sx="100000" sy="100000" kx="0" ky="0" algn="bl" rotWithShape="0" blurRad="19050" dist="50800" dir="2700000">
+            <a:outerShdw blurRad="19050" dist="50800" dir="2700000" algn="bl" rotWithShape="0">
               <a:srgbClr val="000000">
                 <a:alpha val="10000"/>
               </a:srgbClr>
             </a:outerShdw>
           </a:effectLst>
         </p:spPr>
+        <p:txBody>
+          <a:bodyPr/>
+          <a:lstStyle/>
+          <a:p>
+            <a:endParaRPr lang="en-US"/>
+          </a:p>
+        </p:txBody>
       </p:sp>
       <p:sp>
         <p:nvSpPr>
@@ -5906,6 +5980,13 @@
             <a:prstDash val="solid"/>
           </a:ln>
         </p:spPr>
+        <p:txBody>
+          <a:bodyPr/>
+          <a:lstStyle/>
+          <a:p>
+            <a:endParaRPr lang="en-US"/>
+          </a:p>
+        </p:txBody>
       </p:sp>
       <p:sp>
         <p:nvSpPr>
@@ -5928,7 +6009,7 @@
           <a:bodyPr wrap="square" lIns="0" tIns="0" rIns="0" bIns="0" rtlCol="0" anchor="ctr"/>
           <a:lstStyle/>
           <a:p>
-            <a:pPr indent="0" marL="0">
+            <a:pPr marL="0" indent="0">
               <a:buNone/>
             </a:pPr>
             <a:r>
@@ -5966,7 +6047,7 @@
           </a:bodyPr>
           <a:lstStyle/>
           <a:p>
-            <a:pPr indent="0" marL="0">
+            <a:pPr marL="0" indent="0">
               <a:buNone/>
             </a:pPr>
             <a:r>
@@ -6007,13 +6088,20 @@
             <a:prstDash val="solid"/>
           </a:ln>
           <a:effectLst>
-            <a:outerShdw sx="100000" sy="100000" kx="0" ky="0" algn="bl" rotWithShape="0" blurRad="19050" dist="50800" dir="2700000">
+            <a:outerShdw blurRad="19050" dist="50800" dir="2700000" algn="bl" rotWithShape="0">
               <a:srgbClr val="000000">
                 <a:alpha val="10000"/>
               </a:srgbClr>
             </a:outerShdw>
           </a:effectLst>
         </p:spPr>
+        <p:txBody>
+          <a:bodyPr/>
+          <a:lstStyle/>
+          <a:p>
+            <a:endParaRPr lang="en-US"/>
+          </a:p>
+        </p:txBody>
       </p:sp>
       <p:sp>
         <p:nvSpPr>
@@ -6041,6 +6129,13 @@
             <a:prstDash val="solid"/>
           </a:ln>
         </p:spPr>
+        <p:txBody>
+          <a:bodyPr/>
+          <a:lstStyle/>
+          <a:p>
+            <a:endParaRPr lang="en-US"/>
+          </a:p>
+        </p:txBody>
       </p:sp>
       <p:sp>
         <p:nvSpPr>
@@ -6063,7 +6158,7 @@
           <a:bodyPr wrap="square" lIns="0" tIns="0" rIns="0" bIns="0" rtlCol="0" anchor="ctr"/>
           <a:lstStyle/>
           <a:p>
-            <a:pPr indent="0" marL="0">
+            <a:pPr marL="0" indent="0">
               <a:buNone/>
             </a:pPr>
             <a:r>
@@ -6101,7 +6196,7 @@
           </a:bodyPr>
           <a:lstStyle/>
           <a:p>
-            <a:pPr indent="0" marL="0">
+            <a:pPr marL="0" indent="0">
               <a:buNone/>
             </a:pPr>
             <a:r>
@@ -6132,6 +6227,7 @@
         <a:solidFill>
           <a:srgbClr val="FBFCFE"/>
         </a:solidFill>
+        <a:effectLst/>
       </p:bgPr>
     </p:bg>
     <p:spTree>
@@ -6176,6 +6272,13 @@
             <a:prstDash val="solid"/>
           </a:ln>
         </p:spPr>
+        <p:txBody>
+          <a:bodyPr/>
+          <a:lstStyle/>
+          <a:p>
+            <a:endParaRPr lang="en-US"/>
+          </a:p>
+        </p:txBody>
       </p:sp>
       <p:sp>
         <p:nvSpPr>
@@ -6205,6 +6308,13 @@
             <a:prstDash val="solid"/>
           </a:ln>
         </p:spPr>
+        <p:txBody>
+          <a:bodyPr/>
+          <a:lstStyle/>
+          <a:p>
+            <a:endParaRPr lang="en-US"/>
+          </a:p>
+        </p:txBody>
       </p:sp>
       <p:sp>
         <p:nvSpPr>
@@ -6232,6 +6342,13 @@
             <a:prstDash val="solid"/>
           </a:ln>
         </p:spPr>
+        <p:txBody>
+          <a:bodyPr/>
+          <a:lstStyle/>
+          <a:p>
+            <a:endParaRPr lang="en-US"/>
+          </a:p>
+        </p:txBody>
       </p:sp>
       <p:sp>
         <p:nvSpPr>
@@ -6257,6 +6374,13 @@
             <a:tailEnd type="none"/>
           </a:ln>
         </p:spPr>
+        <p:txBody>
+          <a:bodyPr/>
+          <a:lstStyle/>
+          <a:p>
+            <a:endParaRPr lang="en-US"/>
+          </a:p>
+        </p:txBody>
       </p:sp>
       <p:sp>
         <p:nvSpPr>
@@ -6279,7 +6403,7 @@
           <a:bodyPr wrap="square" rtlCol="0" anchor="ctr"/>
           <a:lstStyle/>
           <a:p>
-            <a:pPr indent="0" marL="0">
+            <a:pPr marL="0" indent="0">
               <a:buNone/>
             </a:pPr>
             <a:r>
@@ -6315,7 +6439,7 @@
           <a:bodyPr wrap="square" lIns="0" tIns="0" rIns="0" bIns="0" rtlCol="0" anchor="ctr"/>
           <a:lstStyle/>
           <a:p>
-            <a:pPr indent="0" marL="0">
+            <a:pPr marL="0" indent="0">
               <a:buNone/>
             </a:pPr>
             <a:r>
@@ -6351,7 +6475,7 @@
           <a:bodyPr wrap="square" lIns="0" tIns="0" rIns="0" bIns="0" rtlCol="0" anchor="ctr"/>
           <a:lstStyle/>
           <a:p>
-            <a:pPr indent="0" marL="0">
+            <a:pPr marL="0" indent="0">
               <a:buNone/>
             </a:pPr>
             <a:r>
@@ -6388,6 +6512,13 @@
             <a:prstDash val="solid"/>
           </a:ln>
         </p:spPr>
+        <p:txBody>
+          <a:bodyPr/>
+          <a:lstStyle/>
+          <a:p>
+            <a:endParaRPr lang="en-US"/>
+          </a:p>
+        </p:txBody>
       </p:sp>
       <p:sp>
         <p:nvSpPr>
@@ -6410,7 +6541,7 @@
           <a:bodyPr wrap="square" rtlCol="0" anchor="ctr"/>
           <a:lstStyle/>
           <a:p>
-            <a:pPr indent="0" marL="0">
+            <a:pPr marL="0" indent="0">
               <a:buNone/>
             </a:pPr>
             <a:r>
@@ -6449,7 +6580,7 @@
           <a:bodyPr wrap="square" rtlCol="0" anchor="ctr"/>
           <a:lstStyle/>
           <a:p>
-            <a:pPr algn="r" indent="0" marL="0">
+            <a:pPr marL="0" indent="0" algn="r">
               <a:buNone/>
             </a:pPr>
             <a:r>
@@ -6493,13 +6624,20 @@
             <a:prstDash val="solid"/>
           </a:ln>
           <a:effectLst>
-            <a:outerShdw sx="100000" sy="100000" kx="0" ky="0" algn="bl" rotWithShape="0" blurRad="12700" dist="50800" dir="2700000">
+            <a:outerShdw blurRad="12700" dist="50800" dir="2700000" algn="bl" rotWithShape="0">
               <a:srgbClr val="000000">
                 <a:alpha val="7000"/>
               </a:srgbClr>
             </a:outerShdw>
           </a:effectLst>
         </p:spPr>
+        <p:txBody>
+          <a:bodyPr/>
+          <a:lstStyle/>
+          <a:p>
+            <a:endParaRPr lang="en-US"/>
+          </a:p>
+        </p:txBody>
       </p:sp>
       <p:sp>
         <p:nvSpPr>
@@ -6527,6 +6665,13 @@
             <a:prstDash val="solid"/>
           </a:ln>
         </p:spPr>
+        <p:txBody>
+          <a:bodyPr/>
+          <a:lstStyle/>
+          <a:p>
+            <a:endParaRPr lang="en-US"/>
+          </a:p>
+        </p:txBody>
       </p:sp>
       <p:sp>
         <p:nvSpPr>
@@ -6551,7 +6696,7 @@
           </a:bodyPr>
           <a:lstStyle/>
           <a:p>
-            <a:pPr indent="0" marL="0">
+            <a:pPr marL="0" indent="0">
               <a:buNone/>
             </a:pPr>
             <a:r>
@@ -6588,6 +6733,13 @@
             <a:prstDash val="solid"/>
           </a:ln>
         </p:spPr>
+        <p:txBody>
+          <a:bodyPr/>
+          <a:lstStyle/>
+          <a:p>
+            <a:endParaRPr lang="en-US"/>
+          </a:p>
+        </p:txBody>
       </p:sp>
       <p:sp>
         <p:nvSpPr>
@@ -6613,6 +6765,13 @@
             <a:prstDash val="solid"/>
           </a:ln>
         </p:spPr>
+        <p:txBody>
+          <a:bodyPr/>
+          <a:lstStyle/>
+          <a:p>
+            <a:endParaRPr lang="en-US"/>
+          </a:p>
+        </p:txBody>
       </p:sp>
       <p:sp>
         <p:nvSpPr>
@@ -6637,7 +6796,7 @@
           </a:bodyPr>
           <a:lstStyle/>
           <a:p>
-            <a:pPr indent="0" marL="0">
+            <a:pPr marL="0" indent="0">
               <a:buNone/>
             </a:pPr>
             <a:r>
@@ -6676,6 +6835,13 @@
             <a:prstDash val="solid"/>
           </a:ln>
         </p:spPr>
+        <p:txBody>
+          <a:bodyPr/>
+          <a:lstStyle/>
+          <a:p>
+            <a:endParaRPr lang="en-US"/>
+          </a:p>
+        </p:txBody>
       </p:sp>
       <p:sp>
         <p:nvSpPr>
@@ -6700,7 +6866,7 @@
           </a:bodyPr>
           <a:lstStyle/>
           <a:p>
-            <a:pPr indent="0" marL="0">
+            <a:pPr marL="0" indent="0">
               <a:buNone/>
             </a:pPr>
             <a:r>
@@ -6739,6 +6905,13 @@
             <a:prstDash val="solid"/>
           </a:ln>
         </p:spPr>
+        <p:txBody>
+          <a:bodyPr/>
+          <a:lstStyle/>
+          <a:p>
+            <a:endParaRPr lang="en-US"/>
+          </a:p>
+        </p:txBody>
       </p:sp>
       <p:sp>
         <p:nvSpPr>
@@ -6763,7 +6936,7 @@
           </a:bodyPr>
           <a:lstStyle/>
           <a:p>
-            <a:pPr indent="0" marL="0">
+            <a:pPr marL="0" indent="0">
               <a:buNone/>
             </a:pPr>
             <a:r>
@@ -6804,13 +6977,20 @@
             <a:prstDash val="solid"/>
           </a:ln>
           <a:effectLst>
-            <a:outerShdw sx="100000" sy="100000" kx="0" ky="0" algn="bl" rotWithShape="0" blurRad="12700" dist="50800" dir="2700000">
+            <a:outerShdw blurRad="12700" dist="50800" dir="2700000" algn="bl" rotWithShape="0">
               <a:srgbClr val="000000">
                 <a:alpha val="7000"/>
               </a:srgbClr>
             </a:outerShdw>
           </a:effectLst>
         </p:spPr>
+        <p:txBody>
+          <a:bodyPr/>
+          <a:lstStyle/>
+          <a:p>
+            <a:endParaRPr lang="en-US"/>
+          </a:p>
+        </p:txBody>
       </p:sp>
       <p:sp>
         <p:nvSpPr>
@@ -6838,6 +7018,13 @@
             <a:prstDash val="solid"/>
           </a:ln>
         </p:spPr>
+        <p:txBody>
+          <a:bodyPr/>
+          <a:lstStyle/>
+          <a:p>
+            <a:endParaRPr lang="en-US"/>
+          </a:p>
+        </p:txBody>
       </p:sp>
       <p:sp>
         <p:nvSpPr>
@@ -6862,7 +7049,7 @@
           </a:bodyPr>
           <a:lstStyle/>
           <a:p>
-            <a:pPr indent="0" marL="0">
+            <a:pPr marL="0" indent="0">
               <a:buNone/>
             </a:pPr>
             <a:r>
@@ -6899,6 +7086,13 @@
             <a:prstDash val="solid"/>
           </a:ln>
         </p:spPr>
+        <p:txBody>
+          <a:bodyPr/>
+          <a:lstStyle/>
+          <a:p>
+            <a:endParaRPr lang="en-US"/>
+          </a:p>
+        </p:txBody>
       </p:sp>
       <p:sp>
         <p:nvSpPr>
@@ -6924,6 +7118,13 @@
             <a:prstDash val="solid"/>
           </a:ln>
         </p:spPr>
+        <p:txBody>
+          <a:bodyPr/>
+          <a:lstStyle/>
+          <a:p>
+            <a:endParaRPr lang="en-US"/>
+          </a:p>
+        </p:txBody>
       </p:sp>
       <p:sp>
         <p:nvSpPr>
@@ -6948,7 +7149,7 @@
           </a:bodyPr>
           <a:lstStyle/>
           <a:p>
-            <a:pPr indent="0" marL="0">
+            <a:pPr marL="0" indent="0">
               <a:buNone/>
             </a:pPr>
             <a:r>
@@ -6987,6 +7188,13 @@
             <a:prstDash val="solid"/>
           </a:ln>
         </p:spPr>
+        <p:txBody>
+          <a:bodyPr/>
+          <a:lstStyle/>
+          <a:p>
+            <a:endParaRPr lang="en-US"/>
+          </a:p>
+        </p:txBody>
       </p:sp>
       <p:sp>
         <p:nvSpPr>
@@ -7011,7 +7219,7 @@
           </a:bodyPr>
           <a:lstStyle/>
           <a:p>
-            <a:pPr indent="0" marL="0">
+            <a:pPr marL="0" indent="0">
               <a:buNone/>
             </a:pPr>
             <a:r>
@@ -7050,6 +7258,13 @@
             <a:prstDash val="solid"/>
           </a:ln>
         </p:spPr>
+        <p:txBody>
+          <a:bodyPr/>
+          <a:lstStyle/>
+          <a:p>
+            <a:endParaRPr lang="en-US"/>
+          </a:p>
+        </p:txBody>
       </p:sp>
       <p:sp>
         <p:nvSpPr>
@@ -7074,7 +7289,7 @@
           </a:bodyPr>
           <a:lstStyle/>
           <a:p>
-            <a:pPr indent="0" marL="0">
+            <a:pPr marL="0" indent="0">
               <a:buNone/>
             </a:pPr>
             <a:r>
@@ -7115,13 +7330,20 @@
             <a:prstDash val="solid"/>
           </a:ln>
           <a:effectLst>
-            <a:outerShdw sx="100000" sy="100000" kx="0" ky="0" algn="bl" rotWithShape="0" blurRad="12700" dist="50800" dir="2700000">
+            <a:outerShdw blurRad="12700" dist="50800" dir="2700000" algn="bl" rotWithShape="0">
               <a:srgbClr val="000000">
                 <a:alpha val="7000"/>
               </a:srgbClr>
             </a:outerShdw>
           </a:effectLst>
         </p:spPr>
+        <p:txBody>
+          <a:bodyPr/>
+          <a:lstStyle/>
+          <a:p>
+            <a:endParaRPr lang="en-US"/>
+          </a:p>
+        </p:txBody>
       </p:sp>
       <p:sp>
         <p:nvSpPr>
@@ -7149,6 +7371,13 @@
             <a:prstDash val="solid"/>
           </a:ln>
         </p:spPr>
+        <p:txBody>
+          <a:bodyPr/>
+          <a:lstStyle/>
+          <a:p>
+            <a:endParaRPr lang="en-US"/>
+          </a:p>
+        </p:txBody>
       </p:sp>
       <p:sp>
         <p:nvSpPr>
@@ -7173,7 +7402,7 @@
           </a:bodyPr>
           <a:lstStyle/>
           <a:p>
-            <a:pPr indent="0" marL="0">
+            <a:pPr marL="0" indent="0">
               <a:buNone/>
             </a:pPr>
             <a:r>
@@ -7210,6 +7439,13 @@
             <a:prstDash val="solid"/>
           </a:ln>
         </p:spPr>
+        <p:txBody>
+          <a:bodyPr/>
+          <a:lstStyle/>
+          <a:p>
+            <a:endParaRPr lang="en-US"/>
+          </a:p>
+        </p:txBody>
       </p:sp>
       <p:sp>
         <p:nvSpPr>
@@ -7235,6 +7471,13 @@
             <a:prstDash val="solid"/>
           </a:ln>
         </p:spPr>
+        <p:txBody>
+          <a:bodyPr/>
+          <a:lstStyle/>
+          <a:p>
+            <a:endParaRPr lang="en-US"/>
+          </a:p>
+        </p:txBody>
       </p:sp>
       <p:sp>
         <p:nvSpPr>
@@ -7259,7 +7502,7 @@
           </a:bodyPr>
           <a:lstStyle/>
           <a:p>
-            <a:pPr indent="0" marL="0">
+            <a:pPr marL="0" indent="0">
               <a:buNone/>
             </a:pPr>
             <a:r>
@@ -7298,6 +7541,13 @@
             <a:prstDash val="solid"/>
           </a:ln>
         </p:spPr>
+        <p:txBody>
+          <a:bodyPr/>
+          <a:lstStyle/>
+          <a:p>
+            <a:endParaRPr lang="en-US"/>
+          </a:p>
+        </p:txBody>
       </p:sp>
       <p:sp>
         <p:nvSpPr>
@@ -7322,7 +7572,7 @@
           </a:bodyPr>
           <a:lstStyle/>
           <a:p>
-            <a:pPr indent="0" marL="0">
+            <a:pPr marL="0" indent="0">
               <a:buNone/>
             </a:pPr>
             <a:r>
@@ -7361,6 +7611,13 @@
             <a:prstDash val="solid"/>
           </a:ln>
         </p:spPr>
+        <p:txBody>
+          <a:bodyPr/>
+          <a:lstStyle/>
+          <a:p>
+            <a:endParaRPr lang="en-US"/>
+          </a:p>
+        </p:txBody>
       </p:sp>
       <p:sp>
         <p:nvSpPr>
@@ -7385,7 +7642,7 @@
           </a:bodyPr>
           <a:lstStyle/>
           <a:p>
-            <a:pPr indent="0" marL="0">
+            <a:pPr marL="0" indent="0">
               <a:buNone/>
             </a:pPr>
             <a:r>
@@ -7426,13 +7683,20 @@
             <a:prstDash val="solid"/>
           </a:ln>
           <a:effectLst>
-            <a:outerShdw sx="100000" sy="100000" kx="0" ky="0" algn="bl" rotWithShape="0" blurRad="12700" dist="50800" dir="2700000">
+            <a:outerShdw blurRad="12700" dist="50800" dir="2700000" algn="bl" rotWithShape="0">
               <a:srgbClr val="000000">
                 <a:alpha val="7000"/>
               </a:srgbClr>
             </a:outerShdw>
           </a:effectLst>
         </p:spPr>
+        <p:txBody>
+          <a:bodyPr/>
+          <a:lstStyle/>
+          <a:p>
+            <a:endParaRPr lang="en-US"/>
+          </a:p>
+        </p:txBody>
       </p:sp>
       <p:sp>
         <p:nvSpPr>
@@ -7460,6 +7724,13 @@
             <a:prstDash val="solid"/>
           </a:ln>
         </p:spPr>
+        <p:txBody>
+          <a:bodyPr/>
+          <a:lstStyle/>
+          <a:p>
+            <a:endParaRPr lang="en-US"/>
+          </a:p>
+        </p:txBody>
       </p:sp>
       <p:sp>
         <p:nvSpPr>
@@ -7484,7 +7755,7 @@
           </a:bodyPr>
           <a:lstStyle/>
           <a:p>
-            <a:pPr indent="0" marL="0">
+            <a:pPr marL="0" indent="0">
               <a:buNone/>
             </a:pPr>
             <a:r>
@@ -7521,6 +7792,13 @@
             <a:prstDash val="solid"/>
           </a:ln>
         </p:spPr>
+        <p:txBody>
+          <a:bodyPr/>
+          <a:lstStyle/>
+          <a:p>
+            <a:endParaRPr lang="en-US"/>
+          </a:p>
+        </p:txBody>
       </p:sp>
       <p:sp>
         <p:nvSpPr>
@@ -7546,6 +7824,13 @@
             <a:prstDash val="solid"/>
           </a:ln>
         </p:spPr>
+        <p:txBody>
+          <a:bodyPr/>
+          <a:lstStyle/>
+          <a:p>
+            <a:endParaRPr lang="en-US"/>
+          </a:p>
+        </p:txBody>
       </p:sp>
       <p:sp>
         <p:nvSpPr>
@@ -7570,7 +7855,7 @@
           </a:bodyPr>
           <a:lstStyle/>
           <a:p>
-            <a:pPr indent="0" marL="0">
+            <a:pPr marL="0" indent="0">
               <a:buNone/>
             </a:pPr>
             <a:r>
@@ -7609,6 +7894,13 @@
             <a:prstDash val="solid"/>
           </a:ln>
         </p:spPr>
+        <p:txBody>
+          <a:bodyPr/>
+          <a:lstStyle/>
+          <a:p>
+            <a:endParaRPr lang="en-US"/>
+          </a:p>
+        </p:txBody>
       </p:sp>
       <p:sp>
         <p:nvSpPr>
@@ -7633,7 +7925,7 @@
           </a:bodyPr>
           <a:lstStyle/>
           <a:p>
-            <a:pPr indent="0" marL="0">
+            <a:pPr marL="0" indent="0">
               <a:buNone/>
             </a:pPr>
             <a:r>
@@ -7672,6 +7964,13 @@
             <a:prstDash val="solid"/>
           </a:ln>
         </p:spPr>
+        <p:txBody>
+          <a:bodyPr/>
+          <a:lstStyle/>
+          <a:p>
+            <a:endParaRPr lang="en-US"/>
+          </a:p>
+        </p:txBody>
       </p:sp>
       <p:sp>
         <p:nvSpPr>
@@ -7696,7 +7995,7 @@
           </a:bodyPr>
           <a:lstStyle/>
           <a:p>
-            <a:pPr indent="0" marL="0">
+            <a:pPr marL="0" indent="0">
               <a:buNone/>
             </a:pPr>
             <a:r>
@@ -7727,6 +8026,7 @@
         <a:solidFill>
           <a:srgbClr val="FBFCFE"/>
         </a:solidFill>
+        <a:effectLst/>
       </p:bgPr>
     </p:bg>
     <p:spTree>
@@ -7771,6 +8071,13 @@
             <a:prstDash val="solid"/>
           </a:ln>
         </p:spPr>
+        <p:txBody>
+          <a:bodyPr/>
+          <a:lstStyle/>
+          <a:p>
+            <a:endParaRPr lang="en-US"/>
+          </a:p>
+        </p:txBody>
       </p:sp>
       <p:sp>
         <p:nvSpPr>
@@ -7800,6 +8107,13 @@
             <a:prstDash val="solid"/>
           </a:ln>
         </p:spPr>
+        <p:txBody>
+          <a:bodyPr/>
+          <a:lstStyle/>
+          <a:p>
+            <a:endParaRPr lang="en-US"/>
+          </a:p>
+        </p:txBody>
       </p:sp>
       <p:sp>
         <p:nvSpPr>
@@ -7827,6 +8141,13 @@
             <a:prstDash val="solid"/>
           </a:ln>
         </p:spPr>
+        <p:txBody>
+          <a:bodyPr/>
+          <a:lstStyle/>
+          <a:p>
+            <a:endParaRPr lang="en-US"/>
+          </a:p>
+        </p:txBody>
       </p:sp>
       <p:sp>
         <p:nvSpPr>
@@ -7852,6 +8173,13 @@
             <a:tailEnd type="none"/>
           </a:ln>
         </p:spPr>
+        <p:txBody>
+          <a:bodyPr/>
+          <a:lstStyle/>
+          <a:p>
+            <a:endParaRPr lang="en-US"/>
+          </a:p>
+        </p:txBody>
       </p:sp>
       <p:sp>
         <p:nvSpPr>
@@ -7874,7 +8202,7 @@
           <a:bodyPr wrap="square" rtlCol="0" anchor="ctr"/>
           <a:lstStyle/>
           <a:p>
-            <a:pPr indent="0" marL="0">
+            <a:pPr marL="0" indent="0">
               <a:buNone/>
             </a:pPr>
             <a:r>
@@ -7910,7 +8238,7 @@
           <a:bodyPr wrap="square" lIns="0" tIns="0" rIns="0" bIns="0" rtlCol="0" anchor="ctr"/>
           <a:lstStyle/>
           <a:p>
-            <a:pPr indent="0" marL="0">
+            <a:pPr marL="0" indent="0">
               <a:buNone/>
             </a:pPr>
             <a:r>
@@ -7946,7 +8274,7 @@
           <a:bodyPr wrap="square" lIns="0" tIns="0" rIns="0" bIns="0" rtlCol="0" anchor="ctr"/>
           <a:lstStyle/>
           <a:p>
-            <a:pPr indent="0" marL="0">
+            <a:pPr marL="0" indent="0">
               <a:buNone/>
             </a:pPr>
             <a:r>
@@ -7983,6 +8311,13 @@
             <a:prstDash val="solid"/>
           </a:ln>
         </p:spPr>
+        <p:txBody>
+          <a:bodyPr/>
+          <a:lstStyle/>
+          <a:p>
+            <a:endParaRPr lang="en-US"/>
+          </a:p>
+        </p:txBody>
       </p:sp>
       <p:sp>
         <p:nvSpPr>
@@ -8005,7 +8340,7 @@
           <a:bodyPr wrap="square" rtlCol="0" anchor="ctr"/>
           <a:lstStyle/>
           <a:p>
-            <a:pPr indent="0" marL="0">
+            <a:pPr marL="0" indent="0">
               <a:buNone/>
             </a:pPr>
             <a:r>
@@ -8044,7 +8379,7 @@
           <a:bodyPr wrap="square" rtlCol="0" anchor="ctr"/>
           <a:lstStyle/>
           <a:p>
-            <a:pPr algn="r" indent="0" marL="0">
+            <a:pPr marL="0" indent="0" algn="r">
               <a:buNone/>
             </a:pPr>
             <a:r>
@@ -8088,13 +8423,20 @@
             <a:prstDash val="solid"/>
           </a:ln>
           <a:effectLst>
-            <a:outerShdw sx="100000" sy="100000" kx="0" ky="0" algn="bl" rotWithShape="0" blurRad="19050" dist="50800" dir="2700000">
+            <a:outerShdw blurRad="19050" dist="50800" dir="2700000" algn="bl" rotWithShape="0">
               <a:srgbClr val="000000">
                 <a:alpha val="10000"/>
               </a:srgbClr>
             </a:outerShdw>
           </a:effectLst>
         </p:spPr>
+        <p:txBody>
+          <a:bodyPr/>
+          <a:lstStyle/>
+          <a:p>
+            <a:endParaRPr lang="en-US"/>
+          </a:p>
+        </p:txBody>
       </p:sp>
       <p:sp>
         <p:nvSpPr>
@@ -8122,6 +8464,13 @@
             <a:prstDash val="solid"/>
           </a:ln>
         </p:spPr>
+        <p:txBody>
+          <a:bodyPr/>
+          <a:lstStyle/>
+          <a:p>
+            <a:endParaRPr lang="en-US"/>
+          </a:p>
+        </p:txBody>
       </p:sp>
       <p:sp>
         <p:nvSpPr>
@@ -8144,7 +8493,7 @@
           <a:bodyPr wrap="square" lIns="0" tIns="0" rIns="0" bIns="0" rtlCol="0" anchor="ctr"/>
           <a:lstStyle/>
           <a:p>
-            <a:pPr indent="0" marL="0">
+            <a:pPr marL="0" indent="0">
               <a:buNone/>
             </a:pPr>
             <a:r>
@@ -8182,7 +8531,7 @@
           </a:bodyPr>
           <a:lstStyle/>
           <a:p>
-            <a:pPr indent="0" marL="0">
+            <a:pPr marL="0" indent="0">
               <a:buNone/>
             </a:pPr>
             <a:r>
@@ -8223,13 +8572,20 @@
             <a:prstDash val="solid"/>
           </a:ln>
           <a:effectLst>
-            <a:outerShdw sx="100000" sy="100000" kx="0" ky="0" algn="bl" rotWithShape="0" blurRad="19050" dist="50800" dir="2700000">
+            <a:outerShdw blurRad="19050" dist="50800" dir="2700000" algn="bl" rotWithShape="0">
               <a:srgbClr val="000000">
                 <a:alpha val="10000"/>
               </a:srgbClr>
             </a:outerShdw>
           </a:effectLst>
         </p:spPr>
+        <p:txBody>
+          <a:bodyPr/>
+          <a:lstStyle/>
+          <a:p>
+            <a:endParaRPr lang="en-US"/>
+          </a:p>
+        </p:txBody>
       </p:sp>
       <p:sp>
         <p:nvSpPr>
@@ -8257,6 +8613,13 @@
             <a:prstDash val="solid"/>
           </a:ln>
         </p:spPr>
+        <p:txBody>
+          <a:bodyPr/>
+          <a:lstStyle/>
+          <a:p>
+            <a:endParaRPr lang="en-US"/>
+          </a:p>
+        </p:txBody>
       </p:sp>
       <p:sp>
         <p:nvSpPr>
@@ -8279,7 +8642,7 @@
           <a:bodyPr wrap="square" lIns="0" tIns="0" rIns="0" bIns="0" rtlCol="0" anchor="ctr"/>
           <a:lstStyle/>
           <a:p>
-            <a:pPr indent="0" marL="0">
+            <a:pPr marL="0" indent="0">
               <a:buNone/>
             </a:pPr>
             <a:r>
@@ -8317,7 +8680,7 @@
           </a:bodyPr>
           <a:lstStyle/>
           <a:p>
-            <a:pPr indent="0" marL="0">
+            <a:pPr marL="0" indent="0">
               <a:buNone/>
             </a:pPr>
             <a:r>
@@ -8358,13 +8721,20 @@
             <a:prstDash val="solid"/>
           </a:ln>
           <a:effectLst>
-            <a:outerShdw sx="100000" sy="100000" kx="0" ky="0" algn="bl" rotWithShape="0" blurRad="19050" dist="50800" dir="2700000">
+            <a:outerShdw blurRad="19050" dist="50800" dir="2700000" algn="bl" rotWithShape="0">
               <a:srgbClr val="000000">
                 <a:alpha val="10000"/>
               </a:srgbClr>
             </a:outerShdw>
           </a:effectLst>
         </p:spPr>
+        <p:txBody>
+          <a:bodyPr/>
+          <a:lstStyle/>
+          <a:p>
+            <a:endParaRPr lang="en-US"/>
+          </a:p>
+        </p:txBody>
       </p:sp>
       <p:sp>
         <p:nvSpPr>
@@ -8392,6 +8762,13 @@
             <a:prstDash val="solid"/>
           </a:ln>
         </p:spPr>
+        <p:txBody>
+          <a:bodyPr/>
+          <a:lstStyle/>
+          <a:p>
+            <a:endParaRPr lang="en-US"/>
+          </a:p>
+        </p:txBody>
       </p:sp>
       <p:sp>
         <p:nvSpPr>
@@ -8414,7 +8791,7 @@
           <a:bodyPr wrap="square" lIns="0" tIns="0" rIns="0" bIns="0" rtlCol="0" anchor="ctr"/>
           <a:lstStyle/>
           <a:p>
-            <a:pPr indent="0" marL="0">
+            <a:pPr marL="0" indent="0">
               <a:buNone/>
             </a:pPr>
             <a:r>
@@ -8452,7 +8829,7 @@
           </a:bodyPr>
           <a:lstStyle/>
           <a:p>
-            <a:pPr indent="0" marL="0">
+            <a:pPr marL="0" indent="0">
               <a:buNone/>
             </a:pPr>
             <a:r>
@@ -8493,13 +8870,20 @@
             <a:prstDash val="solid"/>
           </a:ln>
           <a:effectLst>
-            <a:outerShdw sx="100000" sy="100000" kx="0" ky="0" algn="bl" rotWithShape="0" blurRad="19050" dist="50800" dir="2700000">
+            <a:outerShdw blurRad="19050" dist="50800" dir="2700000" algn="bl" rotWithShape="0">
               <a:srgbClr val="000000">
                 <a:alpha val="10000"/>
               </a:srgbClr>
             </a:outerShdw>
           </a:effectLst>
         </p:spPr>
+        <p:txBody>
+          <a:bodyPr/>
+          <a:lstStyle/>
+          <a:p>
+            <a:endParaRPr lang="en-US"/>
+          </a:p>
+        </p:txBody>
       </p:sp>
       <p:sp>
         <p:nvSpPr>
@@ -8527,6 +8911,13 @@
             <a:prstDash val="solid"/>
           </a:ln>
         </p:spPr>
+        <p:txBody>
+          <a:bodyPr/>
+          <a:lstStyle/>
+          <a:p>
+            <a:endParaRPr lang="en-US"/>
+          </a:p>
+        </p:txBody>
       </p:sp>
       <p:sp>
         <p:nvSpPr>
@@ -8549,7 +8940,7 @@
           <a:bodyPr wrap="square" lIns="0" tIns="0" rIns="0" bIns="0" rtlCol="0" anchor="ctr"/>
           <a:lstStyle/>
           <a:p>
-            <a:pPr indent="0" marL="0">
+            <a:pPr marL="0" indent="0">
               <a:buNone/>
             </a:pPr>
             <a:r>
@@ -8587,7 +8978,7 @@
           </a:bodyPr>
           <a:lstStyle/>
           <a:p>
-            <a:pPr indent="0" marL="0">
+            <a:pPr marL="0" indent="0">
               <a:buNone/>
             </a:pPr>
             <a:r>
@@ -8628,13 +9019,20 @@
             <a:prstDash val="solid"/>
           </a:ln>
           <a:effectLst>
-            <a:outerShdw sx="100000" sy="100000" kx="0" ky="0" algn="bl" rotWithShape="0" blurRad="19050" dist="50800" dir="2700000">
+            <a:outerShdw blurRad="19050" dist="50800" dir="2700000" algn="bl" rotWithShape="0">
               <a:srgbClr val="000000">
                 <a:alpha val="10000"/>
               </a:srgbClr>
             </a:outerShdw>
           </a:effectLst>
         </p:spPr>
+        <p:txBody>
+          <a:bodyPr/>
+          <a:lstStyle/>
+          <a:p>
+            <a:endParaRPr lang="en-US"/>
+          </a:p>
+        </p:txBody>
       </p:sp>
       <p:sp>
         <p:nvSpPr>
@@ -8662,6 +9060,13 @@
             <a:prstDash val="solid"/>
           </a:ln>
         </p:spPr>
+        <p:txBody>
+          <a:bodyPr/>
+          <a:lstStyle/>
+          <a:p>
+            <a:endParaRPr lang="en-US"/>
+          </a:p>
+        </p:txBody>
       </p:sp>
       <p:sp>
         <p:nvSpPr>
@@ -8684,7 +9089,7 @@
           <a:bodyPr wrap="square" lIns="0" tIns="0" rIns="0" bIns="0" rtlCol="0" anchor="ctr"/>
           <a:lstStyle/>
           <a:p>
-            <a:pPr indent="0" marL="0">
+            <a:pPr marL="0" indent="0">
               <a:buNone/>
             </a:pPr>
             <a:r>
@@ -8722,7 +9127,7 @@
           </a:bodyPr>
           <a:lstStyle/>
           <a:p>
-            <a:pPr indent="0" marL="0">
+            <a:pPr marL="0" indent="0">
               <a:buNone/>
             </a:pPr>
             <a:r>
@@ -8753,6 +9158,7 @@
         <a:solidFill>
           <a:srgbClr val="07182D"/>
         </a:solidFill>
+        <a:effectLst/>
       </p:bgPr>
     </p:bg>
     <p:spTree>
@@ -8795,6 +9201,13 @@
             <a:prstDash val="solid"/>
           </a:ln>
         </p:spPr>
+        <p:txBody>
+          <a:bodyPr/>
+          <a:lstStyle/>
+          <a:p>
+            <a:endParaRPr lang="en-US"/>
+          </a:p>
+        </p:txBody>
       </p:sp>
       <p:sp>
         <p:nvSpPr>
@@ -8824,6 +9237,13 @@
             <a:prstDash val="solid"/>
           </a:ln>
         </p:spPr>
+        <p:txBody>
+          <a:bodyPr/>
+          <a:lstStyle/>
+          <a:p>
+            <a:endParaRPr lang="en-US"/>
+          </a:p>
+        </p:txBody>
       </p:sp>
       <p:sp>
         <p:nvSpPr>
@@ -8853,6 +9273,13 @@
             <a:prstDash val="solid"/>
           </a:ln>
         </p:spPr>
+        <p:txBody>
+          <a:bodyPr/>
+          <a:lstStyle/>
+          <a:p>
+            <a:endParaRPr lang="en-US"/>
+          </a:p>
+        </p:txBody>
       </p:sp>
       <p:sp>
         <p:nvSpPr>
@@ -8878,6 +9305,13 @@
             <a:tailEnd type="none"/>
           </a:ln>
         </p:spPr>
+        <p:txBody>
+          <a:bodyPr/>
+          <a:lstStyle/>
+          <a:p>
+            <a:endParaRPr lang="en-US"/>
+          </a:p>
+        </p:txBody>
       </p:sp>
       <p:sp>
         <p:nvSpPr>
@@ -8900,7 +9334,7 @@
           <a:bodyPr wrap="square" rtlCol="0" anchor="ctr"/>
           <a:lstStyle/>
           <a:p>
-            <a:pPr indent="0" marL="0">
+            <a:pPr marL="0" indent="0">
               <a:buNone/>
             </a:pPr>
             <a:r>
@@ -8936,7 +9370,7 @@
           <a:bodyPr wrap="square" lIns="0" tIns="0" rIns="0" bIns="0" rtlCol="0" anchor="ctr"/>
           <a:lstStyle/>
           <a:p>
-            <a:pPr indent="0" marL="0">
+            <a:pPr marL="0" indent="0">
               <a:buNone/>
             </a:pPr>
             <a:r>
@@ -8972,7 +9406,7 @@
           <a:bodyPr wrap="square" lIns="0" tIns="0" rIns="0" bIns="0" rtlCol="0" anchor="ctr"/>
           <a:lstStyle/>
           <a:p>
-            <a:pPr indent="0" marL="0">
+            <a:pPr marL="0" indent="0">
               <a:buNone/>
             </a:pPr>
             <a:r>
@@ -9011,6 +9445,13 @@
             <a:prstDash val="solid"/>
           </a:ln>
         </p:spPr>
+        <p:txBody>
+          <a:bodyPr/>
+          <a:lstStyle/>
+          <a:p>
+            <a:endParaRPr lang="en-US"/>
+          </a:p>
+        </p:txBody>
       </p:sp>
       <p:sp>
         <p:nvSpPr>
@@ -9033,7 +9474,7 @@
           <a:bodyPr wrap="square" rtlCol="0" anchor="ctr"/>
           <a:lstStyle/>
           <a:p>
-            <a:pPr indent="0" marL="0">
+            <a:pPr marL="0" indent="0">
               <a:buNone/>
             </a:pPr>
             <a:r>
@@ -9072,7 +9513,7 @@
           <a:bodyPr wrap="square" rtlCol="0" anchor="ctr"/>
           <a:lstStyle/>
           <a:p>
-            <a:pPr algn="r" indent="0" marL="0">
+            <a:pPr marL="0" indent="0" algn="r">
               <a:buNone/>
             </a:pPr>
             <a:r>
@@ -9120,13 +9561,20 @@
             <a:prstDash val="solid"/>
           </a:ln>
           <a:effectLst>
-            <a:outerShdw sx="100000" sy="100000" kx="0" ky="0" algn="bl" rotWithShape="0" blurRad="19050" dist="50800" dir="2700000">
+            <a:outerShdw blurRad="19050" dist="50800" dir="2700000" algn="bl" rotWithShape="0">
               <a:srgbClr val="000000">
                 <a:alpha val="25000"/>
               </a:srgbClr>
             </a:outerShdw>
           </a:effectLst>
         </p:spPr>
+        <p:txBody>
+          <a:bodyPr/>
+          <a:lstStyle/>
+          <a:p>
+            <a:endParaRPr lang="en-US"/>
+          </a:p>
+        </p:txBody>
       </p:sp>
       <p:sp>
         <p:nvSpPr>
@@ -9154,6 +9602,13 @@
             <a:prstDash val="solid"/>
           </a:ln>
         </p:spPr>
+        <p:txBody>
+          <a:bodyPr/>
+          <a:lstStyle/>
+          <a:p>
+            <a:endParaRPr lang="en-US"/>
+          </a:p>
+        </p:txBody>
       </p:sp>
       <p:sp>
         <p:nvSpPr>
@@ -9176,7 +9631,7 @@
           <a:bodyPr wrap="square" lIns="0" tIns="0" rIns="0" bIns="0" rtlCol="0" anchor="ctr"/>
           <a:lstStyle/>
           <a:p>
-            <a:pPr indent="0" marL="0">
+            <a:pPr marL="0" indent="0">
               <a:buNone/>
             </a:pPr>
             <a:r>
@@ -9212,7 +9667,7 @@
           <a:bodyPr wrap="square" lIns="0" tIns="0" rIns="0" bIns="0" rtlCol="0" anchor="ctr"/>
           <a:lstStyle/>
           <a:p>
-            <a:pPr indent="0" marL="0">
+            <a:pPr marL="0" indent="0">
               <a:buNone/>
             </a:pPr>
             <a:r>
@@ -9250,7 +9705,7 @@
           </a:bodyPr>
           <a:lstStyle/>
           <a:p>
-            <a:pPr indent="0" marL="0">
+            <a:pPr marL="0" indent="0">
               <a:buNone/>
             </a:pPr>
             <a:r>
@@ -9293,6 +9748,13 @@
             <a:prstDash val="solid"/>
           </a:ln>
         </p:spPr>
+        <p:txBody>
+          <a:bodyPr/>
+          <a:lstStyle/>
+          <a:p>
+            <a:endParaRPr lang="en-US"/>
+          </a:p>
+        </p:txBody>
       </p:sp>
       <p:sp>
         <p:nvSpPr>
@@ -9320,6 +9782,13 @@
             <a:prstDash val="solid"/>
           </a:ln>
         </p:spPr>
+        <p:txBody>
+          <a:bodyPr/>
+          <a:lstStyle/>
+          <a:p>
+            <a:endParaRPr lang="en-US"/>
+          </a:p>
+        </p:txBody>
       </p:sp>
       <p:sp>
         <p:nvSpPr>
@@ -9342,7 +9811,7 @@
           <a:bodyPr wrap="square" lIns="0" tIns="0" rIns="0" bIns="0" rtlCol="0" anchor="ctr"/>
           <a:lstStyle/>
           <a:p>
-            <a:pPr indent="0" marL="0">
+            <a:pPr marL="0" indent="0">
               <a:buNone/>
             </a:pPr>
             <a:r>
@@ -9378,7 +9847,7 @@
           <a:bodyPr wrap="square" lIns="0" tIns="0" rIns="0" bIns="0" rtlCol="0" anchor="ctr"/>
           <a:lstStyle/>
           <a:p>
-            <a:pPr indent="0" marL="0">
+            <a:pPr marL="0" indent="0">
               <a:buNone/>
             </a:pPr>
             <a:r>
@@ -9416,7 +9885,7 @@
           </a:bodyPr>
           <a:lstStyle/>
           <a:p>
-            <a:pPr indent="0" marL="0">
+            <a:pPr marL="0" indent="0">
               <a:buNone/>
             </a:pPr>
             <a:r>
@@ -9459,6 +9928,13 @@
             <a:prstDash val="solid"/>
           </a:ln>
         </p:spPr>
+        <p:txBody>
+          <a:bodyPr/>
+          <a:lstStyle/>
+          <a:p>
+            <a:endParaRPr lang="en-US"/>
+          </a:p>
+        </p:txBody>
       </p:sp>
       <p:sp>
         <p:nvSpPr>
@@ -9486,6 +9962,13 @@
             <a:prstDash val="solid"/>
           </a:ln>
         </p:spPr>
+        <p:txBody>
+          <a:bodyPr/>
+          <a:lstStyle/>
+          <a:p>
+            <a:endParaRPr lang="en-US"/>
+          </a:p>
+        </p:txBody>
       </p:sp>
       <p:sp>
         <p:nvSpPr>
@@ -9508,7 +9991,7 @@
           <a:bodyPr wrap="square" lIns="0" tIns="0" rIns="0" bIns="0" rtlCol="0" anchor="ctr"/>
           <a:lstStyle/>
           <a:p>
-            <a:pPr indent="0" marL="0">
+            <a:pPr marL="0" indent="0">
               <a:buNone/>
             </a:pPr>
             <a:r>
@@ -9544,7 +10027,7 @@
           <a:bodyPr wrap="square" lIns="0" tIns="0" rIns="0" bIns="0" rtlCol="0" anchor="ctr"/>
           <a:lstStyle/>
           <a:p>
-            <a:pPr indent="0" marL="0">
+            <a:pPr marL="0" indent="0">
               <a:buNone/>
             </a:pPr>
             <a:r>
@@ -9582,7 +10065,7 @@
           </a:bodyPr>
           <a:lstStyle/>
           <a:p>
-            <a:pPr indent="0" marL="0">
+            <a:pPr marL="0" indent="0">
               <a:buNone/>
             </a:pPr>
             <a:r>
@@ -9625,6 +10108,13 @@
             <a:prstDash val="solid"/>
           </a:ln>
         </p:spPr>
+        <p:txBody>
+          <a:bodyPr/>
+          <a:lstStyle/>
+          <a:p>
+            <a:endParaRPr lang="en-US"/>
+          </a:p>
+        </p:txBody>
       </p:sp>
       <p:sp>
         <p:nvSpPr>
@@ -9652,6 +10142,13 @@
             <a:prstDash val="solid"/>
           </a:ln>
         </p:spPr>
+        <p:txBody>
+          <a:bodyPr/>
+          <a:lstStyle/>
+          <a:p>
+            <a:endParaRPr lang="en-US"/>
+          </a:p>
+        </p:txBody>
       </p:sp>
       <p:sp>
         <p:nvSpPr>
@@ -9674,7 +10171,7 @@
           <a:bodyPr wrap="square" lIns="0" tIns="0" rIns="0" bIns="0" rtlCol="0" anchor="ctr"/>
           <a:lstStyle/>
           <a:p>
-            <a:pPr indent="0" marL="0">
+            <a:pPr marL="0" indent="0">
               <a:buNone/>
             </a:pPr>
             <a:r>
@@ -9710,7 +10207,7 @@
           <a:bodyPr wrap="square" lIns="0" tIns="0" rIns="0" bIns="0" rtlCol="0" anchor="ctr"/>
           <a:lstStyle/>
           <a:p>
-            <a:pPr indent="0" marL="0">
+            <a:pPr marL="0" indent="0">
               <a:buNone/>
             </a:pPr>
             <a:r>
@@ -9748,7 +10245,7 @@
           </a:bodyPr>
           <a:lstStyle/>
           <a:p>
-            <a:pPr indent="0" marL="0">
+            <a:pPr marL="0" indent="0">
               <a:buNone/>
             </a:pPr>
             <a:r>
@@ -9787,6 +10284,13 @@
             <a:prstDash val="solid"/>
           </a:ln>
         </p:spPr>
+        <p:txBody>
+          <a:bodyPr/>
+          <a:lstStyle/>
+          <a:p>
+            <a:endParaRPr lang="en-US"/>
+          </a:p>
+        </p:txBody>
       </p:sp>
       <p:sp>
         <p:nvSpPr>
@@ -9811,7 +10315,7 @@
           </a:bodyPr>
           <a:lstStyle/>
           <a:p>
-            <a:pPr indent="0" marL="0">
+            <a:pPr marL="0" indent="0">
               <a:buNone/>
             </a:pPr>
             <a:r>
@@ -9850,6 +10354,13 @@
             <a:prstDash val="solid"/>
           </a:ln>
         </p:spPr>
+        <p:txBody>
+          <a:bodyPr/>
+          <a:lstStyle/>
+          <a:p>
+            <a:endParaRPr lang="en-US"/>
+          </a:p>
+        </p:txBody>
       </p:sp>
       <p:sp>
         <p:nvSpPr>
@@ -9874,7 +10385,7 @@
           </a:bodyPr>
           <a:lstStyle/>
           <a:p>
-            <a:pPr indent="0" marL="0">
+            <a:pPr marL="0" indent="0">
               <a:buNone/>
             </a:pPr>
             <a:r>
@@ -9913,6 +10424,13 @@
             <a:prstDash val="solid"/>
           </a:ln>
         </p:spPr>
+        <p:txBody>
+          <a:bodyPr/>
+          <a:lstStyle/>
+          <a:p>
+            <a:endParaRPr lang="en-US"/>
+          </a:p>
+        </p:txBody>
       </p:sp>
       <p:sp>
         <p:nvSpPr>
@@ -9937,7 +10455,7 @@
           </a:bodyPr>
           <a:lstStyle/>
           <a:p>
-            <a:pPr indent="0" marL="0">
+            <a:pPr marL="0" indent="0">
               <a:buNone/>
             </a:pPr>
             <a:r>
@@ -9968,6 +10486,7 @@
         <a:solidFill>
           <a:srgbClr val="FBFCFE"/>
         </a:solidFill>
+        <a:effectLst/>
       </p:bgPr>
     </p:bg>
     <p:spTree>
@@ -10012,6 +10531,13 @@
             <a:prstDash val="solid"/>
           </a:ln>
         </p:spPr>
+        <p:txBody>
+          <a:bodyPr/>
+          <a:lstStyle/>
+          <a:p>
+            <a:endParaRPr lang="en-US"/>
+          </a:p>
+        </p:txBody>
       </p:sp>
       <p:sp>
         <p:nvSpPr>
@@ -10041,6 +10567,13 @@
             <a:prstDash val="solid"/>
           </a:ln>
         </p:spPr>
+        <p:txBody>
+          <a:bodyPr/>
+          <a:lstStyle/>
+          <a:p>
+            <a:endParaRPr lang="en-US"/>
+          </a:p>
+        </p:txBody>
       </p:sp>
       <p:sp>
         <p:nvSpPr>
@@ -10068,6 +10601,13 @@
             <a:prstDash val="solid"/>
           </a:ln>
         </p:spPr>
+        <p:txBody>
+          <a:bodyPr/>
+          <a:lstStyle/>
+          <a:p>
+            <a:endParaRPr lang="en-US"/>
+          </a:p>
+        </p:txBody>
       </p:sp>
       <p:sp>
         <p:nvSpPr>
@@ -10093,6 +10633,13 @@
             <a:tailEnd type="none"/>
           </a:ln>
         </p:spPr>
+        <p:txBody>
+          <a:bodyPr/>
+          <a:lstStyle/>
+          <a:p>
+            <a:endParaRPr lang="en-US"/>
+          </a:p>
+        </p:txBody>
       </p:sp>
       <p:sp>
         <p:nvSpPr>
@@ -10115,7 +10662,7 @@
           <a:bodyPr wrap="square" rtlCol="0" anchor="ctr"/>
           <a:lstStyle/>
           <a:p>
-            <a:pPr indent="0" marL="0">
+            <a:pPr marL="0" indent="0">
               <a:buNone/>
             </a:pPr>
             <a:r>
@@ -10151,7 +10698,7 @@
           <a:bodyPr wrap="square" lIns="0" tIns="0" rIns="0" bIns="0" rtlCol="0" anchor="ctr"/>
           <a:lstStyle/>
           <a:p>
-            <a:pPr indent="0" marL="0">
+            <a:pPr marL="0" indent="0">
               <a:buNone/>
             </a:pPr>
             <a:r>
@@ -10187,7 +10734,7 @@
           <a:bodyPr wrap="square" lIns="0" tIns="0" rIns="0" bIns="0" rtlCol="0" anchor="ctr"/>
           <a:lstStyle/>
           <a:p>
-            <a:pPr indent="0" marL="0">
+            <a:pPr marL="0" indent="0">
               <a:buNone/>
             </a:pPr>
             <a:r>
@@ -10224,6 +10771,13 @@
             <a:prstDash val="solid"/>
           </a:ln>
         </p:spPr>
+        <p:txBody>
+          <a:bodyPr/>
+          <a:lstStyle/>
+          <a:p>
+            <a:endParaRPr lang="en-US"/>
+          </a:p>
+        </p:txBody>
       </p:sp>
       <p:sp>
         <p:nvSpPr>
@@ -10246,7 +10800,7 @@
           <a:bodyPr wrap="square" rtlCol="0" anchor="ctr"/>
           <a:lstStyle/>
           <a:p>
-            <a:pPr indent="0" marL="0">
+            <a:pPr marL="0" indent="0">
               <a:buNone/>
             </a:pPr>
             <a:r>
@@ -10285,7 +10839,7 @@
           <a:bodyPr wrap="square" rtlCol="0" anchor="ctr"/>
           <a:lstStyle/>
           <a:p>
-            <a:pPr algn="r" indent="0" marL="0">
+            <a:pPr marL="0" indent="0" algn="r">
               <a:buNone/>
             </a:pPr>
             <a:r>
@@ -10329,13 +10883,20 @@
             <a:prstDash val="solid"/>
           </a:ln>
           <a:effectLst>
-            <a:outerShdw sx="100000" sy="100000" kx="0" ky="0" algn="bl" rotWithShape="0" blurRad="12700" dist="50800" dir="2700000">
+            <a:outerShdw blurRad="12700" dist="50800" dir="2700000" algn="bl" rotWithShape="0">
               <a:srgbClr val="000000">
                 <a:alpha val="7000"/>
               </a:srgbClr>
             </a:outerShdw>
           </a:effectLst>
         </p:spPr>
+        <p:txBody>
+          <a:bodyPr/>
+          <a:lstStyle/>
+          <a:p>
+            <a:endParaRPr lang="en-US"/>
+          </a:p>
+        </p:txBody>
       </p:sp>
       <p:sp>
         <p:nvSpPr>
@@ -10358,7 +10919,7 @@
           <a:bodyPr wrap="square" lIns="0" tIns="0" rIns="0" bIns="0" rtlCol="0" anchor="ctr"/>
           <a:lstStyle/>
           <a:p>
-            <a:pPr indent="0" marL="0">
+            <a:pPr marL="0" indent="0">
               <a:buNone/>
             </a:pPr>
             <a:r>
@@ -10399,6 +10960,13 @@
             <a:prstDash val="solid"/>
           </a:ln>
         </p:spPr>
+        <p:txBody>
+          <a:bodyPr/>
+          <a:lstStyle/>
+          <a:p>
+            <a:endParaRPr lang="en-US"/>
+          </a:p>
+        </p:txBody>
       </p:sp>
       <p:sp>
         <p:nvSpPr>
@@ -10421,7 +10989,7 @@
           <a:bodyPr wrap="square" lIns="0" tIns="0" rIns="0" bIns="0" rtlCol="0" anchor="ctr"/>
           <a:lstStyle/>
           <a:p>
-            <a:pPr algn="ctr" indent="0" marL="0">
+            <a:pPr marL="0" indent="0" algn="ctr">
               <a:buNone/>
             </a:pPr>
             <a:r>
@@ -10457,7 +11025,7 @@
           <a:bodyPr wrap="square" lIns="0" tIns="0" rIns="0" bIns="0" rtlCol="0" anchor="ctr"/>
           <a:lstStyle/>
           <a:p>
-            <a:pPr indent="0" marL="0">
+            <a:pPr marL="0" indent="0">
               <a:buNone/>
             </a:pPr>
             <a:r>
@@ -10495,7 +11063,7 @@
           </a:bodyPr>
           <a:lstStyle/>
           <a:p>
-            <a:pPr indent="0" marL="0">
+            <a:pPr marL="0" indent="0">
               <a:buNone/>
             </a:pPr>
             <a:r>
@@ -10536,6 +11104,13 @@
             <a:prstDash val="solid"/>
           </a:ln>
         </p:spPr>
+        <p:txBody>
+          <a:bodyPr/>
+          <a:lstStyle/>
+          <a:p>
+            <a:endParaRPr lang="en-US"/>
+          </a:p>
+        </p:txBody>
       </p:sp>
       <p:sp>
         <p:nvSpPr>
@@ -10558,7 +11133,7 @@
           <a:bodyPr wrap="square" lIns="0" tIns="0" rIns="0" bIns="0" rtlCol="0" anchor="ctr"/>
           <a:lstStyle/>
           <a:p>
-            <a:pPr algn="ctr" indent="0" marL="0">
+            <a:pPr marL="0" indent="0" algn="ctr">
               <a:buNone/>
             </a:pPr>
             <a:r>
@@ -10594,7 +11169,7 @@
           <a:bodyPr wrap="square" lIns="0" tIns="0" rIns="0" bIns="0" rtlCol="0" anchor="ctr"/>
           <a:lstStyle/>
           <a:p>
-            <a:pPr indent="0" marL="0">
+            <a:pPr marL="0" indent="0">
               <a:buNone/>
             </a:pPr>
             <a:r>
@@ -10632,7 +11207,7 @@
           </a:bodyPr>
           <a:lstStyle/>
           <a:p>
-            <a:pPr indent="0" marL="0">
+            <a:pPr marL="0" indent="0">
               <a:buNone/>
             </a:pPr>
             <a:r>
@@ -10673,6 +11248,13 @@
             <a:prstDash val="solid"/>
           </a:ln>
         </p:spPr>
+        <p:txBody>
+          <a:bodyPr/>
+          <a:lstStyle/>
+          <a:p>
+            <a:endParaRPr lang="en-US"/>
+          </a:p>
+        </p:txBody>
       </p:sp>
       <p:sp>
         <p:nvSpPr>
@@ -10695,7 +11277,7 @@
           <a:bodyPr wrap="square" lIns="0" tIns="0" rIns="0" bIns="0" rtlCol="0" anchor="ctr"/>
           <a:lstStyle/>
           <a:p>
-            <a:pPr algn="ctr" indent="0" marL="0">
+            <a:pPr marL="0" indent="0" algn="ctr">
               <a:buNone/>
             </a:pPr>
             <a:r>
@@ -10731,7 +11313,7 @@
           <a:bodyPr wrap="square" lIns="0" tIns="0" rIns="0" bIns="0" rtlCol="0" anchor="ctr"/>
           <a:lstStyle/>
           <a:p>
-            <a:pPr indent="0" marL="0">
+            <a:pPr marL="0" indent="0">
               <a:buNone/>
             </a:pPr>
             <a:r>
@@ -10769,7 +11351,7 @@
           </a:bodyPr>
           <a:lstStyle/>
           <a:p>
-            <a:pPr indent="0" marL="0">
+            <a:pPr marL="0" indent="0">
               <a:buNone/>
             </a:pPr>
             <a:r>
@@ -10810,13 +11392,20 @@
             <a:prstDash val="solid"/>
           </a:ln>
           <a:effectLst>
-            <a:outerShdw sx="100000" sy="100000" kx="0" ky="0" algn="bl" rotWithShape="0" blurRad="12700" dist="50800" dir="2700000">
+            <a:outerShdw blurRad="12700" dist="50800" dir="2700000" algn="bl" rotWithShape="0">
               <a:srgbClr val="000000">
                 <a:alpha val="7000"/>
               </a:srgbClr>
             </a:outerShdw>
           </a:effectLst>
         </p:spPr>
+        <p:txBody>
+          <a:bodyPr/>
+          <a:lstStyle/>
+          <a:p>
+            <a:endParaRPr lang="en-US"/>
+          </a:p>
+        </p:txBody>
       </p:sp>
       <p:sp>
         <p:nvSpPr>
@@ -10839,7 +11428,7 @@
           <a:bodyPr wrap="square" lIns="0" tIns="0" rIns="0" bIns="0" rtlCol="0" anchor="ctr"/>
           <a:lstStyle/>
           <a:p>
-            <a:pPr indent="0" marL="0">
+            <a:pPr marL="0" indent="0">
               <a:buNone/>
             </a:pPr>
             <a:r>
@@ -10880,6 +11469,13 @@
             <a:prstDash val="solid"/>
           </a:ln>
         </p:spPr>
+        <p:txBody>
+          <a:bodyPr/>
+          <a:lstStyle/>
+          <a:p>
+            <a:endParaRPr lang="en-US"/>
+          </a:p>
+        </p:txBody>
       </p:sp>
       <p:sp>
         <p:nvSpPr>
@@ -10902,7 +11498,7 @@
           <a:bodyPr wrap="square" lIns="0" tIns="0" rIns="0" bIns="0" rtlCol="0" anchor="ctr"/>
           <a:lstStyle/>
           <a:p>
-            <a:pPr algn="ctr" indent="0" marL="0">
+            <a:pPr marL="0" indent="0" algn="ctr">
               <a:buNone/>
             </a:pPr>
             <a:r>
@@ -10938,7 +11534,7 @@
           <a:bodyPr wrap="square" lIns="0" tIns="0" rIns="0" bIns="0" rtlCol="0" anchor="ctr"/>
           <a:lstStyle/>
           <a:p>
-            <a:pPr indent="0" marL="0">
+            <a:pPr marL="0" indent="0">
               <a:buNone/>
             </a:pPr>
             <a:r>
@@ -10976,7 +11572,7 @@
           </a:bodyPr>
           <a:lstStyle/>
           <a:p>
-            <a:pPr indent="0" marL="0">
+            <a:pPr marL="0" indent="0">
               <a:buNone/>
             </a:pPr>
             <a:r>
@@ -11017,6 +11613,13 @@
             <a:prstDash val="solid"/>
           </a:ln>
         </p:spPr>
+        <p:txBody>
+          <a:bodyPr/>
+          <a:lstStyle/>
+          <a:p>
+            <a:endParaRPr lang="en-US"/>
+          </a:p>
+        </p:txBody>
       </p:sp>
       <p:sp>
         <p:nvSpPr>
@@ -11039,7 +11642,7 @@
           <a:bodyPr wrap="square" lIns="0" tIns="0" rIns="0" bIns="0" rtlCol="0" anchor="ctr"/>
           <a:lstStyle/>
           <a:p>
-            <a:pPr algn="ctr" indent="0" marL="0">
+            <a:pPr marL="0" indent="0" algn="ctr">
               <a:buNone/>
             </a:pPr>
             <a:r>
@@ -11075,7 +11678,7 @@
           <a:bodyPr wrap="square" lIns="0" tIns="0" rIns="0" bIns="0" rtlCol="0" anchor="ctr"/>
           <a:lstStyle/>
           <a:p>
-            <a:pPr indent="0" marL="0">
+            <a:pPr marL="0" indent="0">
               <a:buNone/>
             </a:pPr>
             <a:r>
@@ -11113,7 +11716,7 @@
           </a:bodyPr>
           <a:lstStyle/>
           <a:p>
-            <a:pPr indent="0" marL="0">
+            <a:pPr marL="0" indent="0">
               <a:buNone/>
             </a:pPr>
             <a:r>
@@ -11154,6 +11757,13 @@
             <a:prstDash val="solid"/>
           </a:ln>
         </p:spPr>
+        <p:txBody>
+          <a:bodyPr/>
+          <a:lstStyle/>
+          <a:p>
+            <a:endParaRPr lang="en-US"/>
+          </a:p>
+        </p:txBody>
       </p:sp>
       <p:sp>
         <p:nvSpPr>
@@ -11176,7 +11786,7 @@
           <a:bodyPr wrap="square" lIns="0" tIns="0" rIns="0" bIns="0" rtlCol="0" anchor="ctr"/>
           <a:lstStyle/>
           <a:p>
-            <a:pPr algn="ctr" indent="0" marL="0">
+            <a:pPr marL="0" indent="0" algn="ctr">
               <a:buNone/>
             </a:pPr>
             <a:r>
@@ -11212,7 +11822,7 @@
           <a:bodyPr wrap="square" lIns="0" tIns="0" rIns="0" bIns="0" rtlCol="0" anchor="ctr"/>
           <a:lstStyle/>
           <a:p>
-            <a:pPr indent="0" marL="0">
+            <a:pPr marL="0" indent="0">
               <a:buNone/>
             </a:pPr>
             <a:r>
@@ -11250,7 +11860,7 @@
           </a:bodyPr>
           <a:lstStyle/>
           <a:p>
-            <a:pPr indent="0" marL="0">
+            <a:pPr marL="0" indent="0">
               <a:buNone/>
             </a:pPr>
             <a:r>
@@ -11281,6 +11891,7 @@
         <a:solidFill>
           <a:srgbClr val="FBFCFE"/>
         </a:solidFill>
+        <a:effectLst/>
       </p:bgPr>
     </p:bg>
     <p:spTree>
@@ -11325,6 +11936,13 @@
             <a:prstDash val="solid"/>
           </a:ln>
         </p:spPr>
+        <p:txBody>
+          <a:bodyPr/>
+          <a:lstStyle/>
+          <a:p>
+            <a:endParaRPr lang="en-US"/>
+          </a:p>
+        </p:txBody>
       </p:sp>
       <p:sp>
         <p:nvSpPr>
@@ -11354,6 +11972,13 @@
             <a:prstDash val="solid"/>
           </a:ln>
         </p:spPr>
+        <p:txBody>
+          <a:bodyPr/>
+          <a:lstStyle/>
+          <a:p>
+            <a:endParaRPr lang="en-US"/>
+          </a:p>
+        </p:txBody>
       </p:sp>
       <p:sp>
         <p:nvSpPr>
@@ -11381,6 +12006,13 @@
             <a:prstDash val="solid"/>
           </a:ln>
         </p:spPr>
+        <p:txBody>
+          <a:bodyPr/>
+          <a:lstStyle/>
+          <a:p>
+            <a:endParaRPr lang="en-US"/>
+          </a:p>
+        </p:txBody>
       </p:sp>
       <p:sp>
         <p:nvSpPr>
@@ -11406,6 +12038,13 @@
             <a:tailEnd type="none"/>
           </a:ln>
         </p:spPr>
+        <p:txBody>
+          <a:bodyPr/>
+          <a:lstStyle/>
+          <a:p>
+            <a:endParaRPr lang="en-US"/>
+          </a:p>
+        </p:txBody>
       </p:sp>
       <p:sp>
         <p:nvSpPr>
@@ -11428,7 +12067,7 @@
           <a:bodyPr wrap="square" rtlCol="0" anchor="ctr"/>
           <a:lstStyle/>
           <a:p>
-            <a:pPr indent="0" marL="0">
+            <a:pPr marL="0" indent="0">
               <a:buNone/>
             </a:pPr>
             <a:r>
@@ -11464,7 +12103,7 @@
           <a:bodyPr wrap="square" lIns="0" tIns="0" rIns="0" bIns="0" rtlCol="0" anchor="ctr"/>
           <a:lstStyle/>
           <a:p>
-            <a:pPr indent="0" marL="0">
+            <a:pPr marL="0" indent="0">
               <a:buNone/>
             </a:pPr>
             <a:r>
@@ -11500,7 +12139,7 @@
           <a:bodyPr wrap="square" lIns="0" tIns="0" rIns="0" bIns="0" rtlCol="0" anchor="ctr"/>
           <a:lstStyle/>
           <a:p>
-            <a:pPr indent="0" marL="0">
+            <a:pPr marL="0" indent="0">
               <a:buNone/>
             </a:pPr>
             <a:r>
@@ -11537,6 +12176,13 @@
             <a:prstDash val="solid"/>
           </a:ln>
         </p:spPr>
+        <p:txBody>
+          <a:bodyPr/>
+          <a:lstStyle/>
+          <a:p>
+            <a:endParaRPr lang="en-US"/>
+          </a:p>
+        </p:txBody>
       </p:sp>
       <p:sp>
         <p:nvSpPr>
@@ -11559,7 +12205,7 @@
           <a:bodyPr wrap="square" rtlCol="0" anchor="ctr"/>
           <a:lstStyle/>
           <a:p>
-            <a:pPr indent="0" marL="0">
+            <a:pPr marL="0" indent="0">
               <a:buNone/>
             </a:pPr>
             <a:r>
@@ -11598,7 +12244,7 @@
           <a:bodyPr wrap="square" rtlCol="0" anchor="ctr"/>
           <a:lstStyle/>
           <a:p>
-            <a:pPr algn="r" indent="0" marL="0">
+            <a:pPr marL="0" indent="0" algn="r">
               <a:buNone/>
             </a:pPr>
             <a:r>
@@ -11642,13 +12288,20 @@
             <a:prstDash val="solid"/>
           </a:ln>
           <a:effectLst>
-            <a:outerShdw sx="100000" sy="100000" kx="0" ky="0" algn="bl" rotWithShape="0" blurRad="12700" dist="50800" dir="2700000">
+            <a:outerShdw blurRad="12700" dist="50800" dir="2700000" algn="bl" rotWithShape="0">
               <a:srgbClr val="000000">
                 <a:alpha val="7000"/>
               </a:srgbClr>
             </a:outerShdw>
           </a:effectLst>
         </p:spPr>
+        <p:txBody>
+          <a:bodyPr/>
+          <a:lstStyle/>
+          <a:p>
+            <a:endParaRPr lang="en-US"/>
+          </a:p>
+        </p:txBody>
       </p:sp>
       <p:sp>
         <p:nvSpPr>
@@ -11676,6 +12329,13 @@
             <a:prstDash val="solid"/>
           </a:ln>
         </p:spPr>
+        <p:txBody>
+          <a:bodyPr/>
+          <a:lstStyle/>
+          <a:p>
+            <a:endParaRPr lang="en-US"/>
+          </a:p>
+        </p:txBody>
       </p:sp>
       <p:sp>
         <p:nvSpPr>
@@ -11698,7 +12358,7 @@
           <a:bodyPr wrap="square" lIns="0" tIns="0" rIns="0" bIns="0" rtlCol="0" anchor="ctr"/>
           <a:lstStyle/>
           <a:p>
-            <a:pPr indent="0" marL="0">
+            <a:pPr marL="0" indent="0">
               <a:buNone/>
             </a:pPr>
             <a:r>
@@ -11736,7 +12396,7 @@
           </a:bodyPr>
           <a:lstStyle/>
           <a:p>
-            <a:pPr indent="0" marL="0">
+            <a:pPr marL="0" indent="0">
               <a:buNone/>
             </a:pPr>
             <a:r>
@@ -11777,13 +12437,20 @@
             <a:prstDash val="solid"/>
           </a:ln>
           <a:effectLst>
-            <a:outerShdw sx="100000" sy="100000" kx="0" ky="0" algn="bl" rotWithShape="0" blurRad="12700" dist="50800" dir="2700000">
+            <a:outerShdw blurRad="12700" dist="50800" dir="2700000" algn="bl" rotWithShape="0">
               <a:srgbClr val="000000">
                 <a:alpha val="7000"/>
               </a:srgbClr>
             </a:outerShdw>
           </a:effectLst>
         </p:spPr>
+        <p:txBody>
+          <a:bodyPr/>
+          <a:lstStyle/>
+          <a:p>
+            <a:endParaRPr lang="en-US"/>
+          </a:p>
+        </p:txBody>
       </p:sp>
       <p:sp>
         <p:nvSpPr>
@@ -11811,6 +12478,13 @@
             <a:prstDash val="solid"/>
           </a:ln>
         </p:spPr>
+        <p:txBody>
+          <a:bodyPr/>
+          <a:lstStyle/>
+          <a:p>
+            <a:endParaRPr lang="en-US"/>
+          </a:p>
+        </p:txBody>
       </p:sp>
       <p:sp>
         <p:nvSpPr>
@@ -11833,7 +12507,7 @@
           <a:bodyPr wrap="square" lIns="0" tIns="0" rIns="0" bIns="0" rtlCol="0" anchor="ctr"/>
           <a:lstStyle/>
           <a:p>
-            <a:pPr indent="0" marL="0">
+            <a:pPr marL="0" indent="0">
               <a:buNone/>
             </a:pPr>
             <a:r>
@@ -11871,7 +12545,7 @@
           </a:bodyPr>
           <a:lstStyle/>
           <a:p>
-            <a:pPr indent="0" marL="0">
+            <a:pPr marL="0" indent="0">
               <a:buNone/>
             </a:pPr>
             <a:r>
@@ -11912,13 +12586,20 @@
             <a:prstDash val="solid"/>
           </a:ln>
           <a:effectLst>
-            <a:outerShdw sx="100000" sy="100000" kx="0" ky="0" algn="bl" rotWithShape="0" blurRad="12700" dist="50800" dir="2700000">
+            <a:outerShdw blurRad="12700" dist="50800" dir="2700000" algn="bl" rotWithShape="0">
               <a:srgbClr val="000000">
                 <a:alpha val="7000"/>
               </a:srgbClr>
             </a:outerShdw>
           </a:effectLst>
         </p:spPr>
+        <p:txBody>
+          <a:bodyPr/>
+          <a:lstStyle/>
+          <a:p>
+            <a:endParaRPr lang="en-US"/>
+          </a:p>
+        </p:txBody>
       </p:sp>
       <p:sp>
         <p:nvSpPr>
@@ -11946,6 +12627,13 @@
             <a:prstDash val="solid"/>
           </a:ln>
         </p:spPr>
+        <p:txBody>
+          <a:bodyPr/>
+          <a:lstStyle/>
+          <a:p>
+            <a:endParaRPr lang="en-US"/>
+          </a:p>
+        </p:txBody>
       </p:sp>
       <p:sp>
         <p:nvSpPr>
@@ -11968,7 +12656,7 @@
           <a:bodyPr wrap="square" lIns="0" tIns="0" rIns="0" bIns="0" rtlCol="0" anchor="ctr"/>
           <a:lstStyle/>
           <a:p>
-            <a:pPr indent="0" marL="0">
+            <a:pPr marL="0" indent="0">
               <a:buNone/>
             </a:pPr>
             <a:r>
@@ -12006,7 +12694,7 @@
           </a:bodyPr>
           <a:lstStyle/>
           <a:p>
-            <a:pPr indent="0" marL="0">
+            <a:pPr marL="0" indent="0">
               <a:buNone/>
             </a:pPr>
             <a:r>
@@ -12047,13 +12735,20 @@
             <a:prstDash val="solid"/>
           </a:ln>
           <a:effectLst>
-            <a:outerShdw sx="100000" sy="100000" kx="0" ky="0" algn="bl" rotWithShape="0" blurRad="12700" dist="50800" dir="2700000">
+            <a:outerShdw blurRad="12700" dist="50800" dir="2700000" algn="bl" rotWithShape="0">
               <a:srgbClr val="000000">
                 <a:alpha val="7000"/>
               </a:srgbClr>
             </a:outerShdw>
           </a:effectLst>
         </p:spPr>
+        <p:txBody>
+          <a:bodyPr/>
+          <a:lstStyle/>
+          <a:p>
+            <a:endParaRPr lang="en-US"/>
+          </a:p>
+        </p:txBody>
       </p:sp>
       <p:sp>
         <p:nvSpPr>
@@ -12081,6 +12776,13 @@
             <a:prstDash val="solid"/>
           </a:ln>
         </p:spPr>
+        <p:txBody>
+          <a:bodyPr/>
+          <a:lstStyle/>
+          <a:p>
+            <a:endParaRPr lang="en-US"/>
+          </a:p>
+        </p:txBody>
       </p:sp>
       <p:sp>
         <p:nvSpPr>
@@ -12103,7 +12805,7 @@
           <a:bodyPr wrap="square" lIns="0" tIns="0" rIns="0" bIns="0" rtlCol="0" anchor="ctr"/>
           <a:lstStyle/>
           <a:p>
-            <a:pPr indent="0" marL="0">
+            <a:pPr marL="0" indent="0">
               <a:buNone/>
             </a:pPr>
             <a:r>
@@ -12141,7 +12843,7 @@
           </a:bodyPr>
           <a:lstStyle/>
           <a:p>
-            <a:pPr indent="0" marL="0">
+            <a:pPr marL="0" indent="0">
               <a:buNone/>
             </a:pPr>
             <a:r>
@@ -12172,6 +12874,7 @@
         <a:solidFill>
           <a:srgbClr val="FBFCFE"/>
         </a:solidFill>
+        <a:effectLst/>
       </p:bgPr>
     </p:bg>
     <p:spTree>
@@ -12216,6 +12919,13 @@
             <a:prstDash val="solid"/>
           </a:ln>
         </p:spPr>
+        <p:txBody>
+          <a:bodyPr/>
+          <a:lstStyle/>
+          <a:p>
+            <a:endParaRPr lang="en-US"/>
+          </a:p>
+        </p:txBody>
       </p:sp>
       <p:sp>
         <p:nvSpPr>
@@ -12245,6 +12955,13 @@
             <a:prstDash val="solid"/>
           </a:ln>
         </p:spPr>
+        <p:txBody>
+          <a:bodyPr/>
+          <a:lstStyle/>
+          <a:p>
+            <a:endParaRPr lang="en-US"/>
+          </a:p>
+        </p:txBody>
       </p:sp>
       <p:sp>
         <p:nvSpPr>
@@ -12272,6 +12989,13 @@
             <a:prstDash val="solid"/>
           </a:ln>
         </p:spPr>
+        <p:txBody>
+          <a:bodyPr/>
+          <a:lstStyle/>
+          <a:p>
+            <a:endParaRPr lang="en-US"/>
+          </a:p>
+        </p:txBody>
       </p:sp>
       <p:sp>
         <p:nvSpPr>
@@ -12297,6 +13021,13 @@
             <a:tailEnd type="none"/>
           </a:ln>
         </p:spPr>
+        <p:txBody>
+          <a:bodyPr/>
+          <a:lstStyle/>
+          <a:p>
+            <a:endParaRPr lang="en-US"/>
+          </a:p>
+        </p:txBody>
       </p:sp>
       <p:sp>
         <p:nvSpPr>
@@ -12319,7 +13050,7 @@
           <a:bodyPr wrap="square" rtlCol="0" anchor="ctr"/>
           <a:lstStyle/>
           <a:p>
-            <a:pPr indent="0" marL="0">
+            <a:pPr marL="0" indent="0">
               <a:buNone/>
             </a:pPr>
             <a:r>
@@ -12355,7 +13086,7 @@
           <a:bodyPr wrap="square" lIns="0" tIns="0" rIns="0" bIns="0" rtlCol="0" anchor="ctr"/>
           <a:lstStyle/>
           <a:p>
-            <a:pPr indent="0" marL="0">
+            <a:pPr marL="0" indent="0">
               <a:buNone/>
             </a:pPr>
             <a:r>
@@ -12392,6 +13123,13 @@
             <a:prstDash val="solid"/>
           </a:ln>
         </p:spPr>
+        <p:txBody>
+          <a:bodyPr/>
+          <a:lstStyle/>
+          <a:p>
+            <a:endParaRPr lang="en-US"/>
+          </a:p>
+        </p:txBody>
       </p:sp>
       <p:sp>
         <p:nvSpPr>
@@ -12414,7 +13152,7 @@
           <a:bodyPr wrap="square" rtlCol="0" anchor="ctr"/>
           <a:lstStyle/>
           <a:p>
-            <a:pPr indent="0" marL="0">
+            <a:pPr marL="0" indent="0">
               <a:buNone/>
             </a:pPr>
             <a:r>
@@ -12453,7 +13191,7 @@
           <a:bodyPr wrap="square" rtlCol="0" anchor="ctr"/>
           <a:lstStyle/>
           <a:p>
-            <a:pPr algn="r" indent="0" marL="0">
+            <a:pPr marL="0" indent="0" algn="r">
               <a:buNone/>
             </a:pPr>
             <a:r>
@@ -12497,13 +13235,20 @@
             <a:prstDash val="solid"/>
           </a:ln>
           <a:effectLst>
-            <a:outerShdw sx="100000" sy="100000" kx="0" ky="0" algn="bl" rotWithShape="0" blurRad="12700" dist="50800" dir="2700000">
+            <a:outerShdw blurRad="12700" dist="50800" dir="2700000" algn="bl" rotWithShape="0">
               <a:srgbClr val="000000">
                 <a:alpha val="7000"/>
               </a:srgbClr>
             </a:outerShdw>
           </a:effectLst>
         </p:spPr>
+        <p:txBody>
+          <a:bodyPr/>
+          <a:lstStyle/>
+          <a:p>
+            <a:endParaRPr lang="en-US"/>
+          </a:p>
+        </p:txBody>
       </p:sp>
       <p:sp>
         <p:nvSpPr>
@@ -12526,7 +13271,7 @@
           <a:bodyPr wrap="square" lIns="0" tIns="0" rIns="0" bIns="0" rtlCol="0" anchor="ctr"/>
           <a:lstStyle/>
           <a:p>
-            <a:pPr indent="0" marL="0">
+            <a:pPr marL="0" indent="0">
               <a:buNone/>
             </a:pPr>
             <a:r>
@@ -12565,6 +13310,13 @@
             <a:prstDash val="solid"/>
           </a:ln>
         </p:spPr>
+        <p:txBody>
+          <a:bodyPr/>
+          <a:lstStyle/>
+          <a:p>
+            <a:endParaRPr lang="en-US"/>
+          </a:p>
+        </p:txBody>
       </p:sp>
       <p:sp>
         <p:nvSpPr>
@@ -12589,7 +13341,7 @@
           </a:bodyPr>
           <a:lstStyle/>
           <a:p>
-            <a:pPr indent="0" marL="0">
+            <a:pPr marL="0" indent="0">
               <a:buNone/>
             </a:pPr>
             <a:r>
@@ -12628,6 +13380,13 @@
             <a:prstDash val="solid"/>
           </a:ln>
         </p:spPr>
+        <p:txBody>
+          <a:bodyPr/>
+          <a:lstStyle/>
+          <a:p>
+            <a:endParaRPr lang="en-US"/>
+          </a:p>
+        </p:txBody>
       </p:sp>
       <p:sp>
         <p:nvSpPr>
@@ -12652,7 +13411,7 @@
           </a:bodyPr>
           <a:lstStyle/>
           <a:p>
-            <a:pPr indent="0" marL="0">
+            <a:pPr marL="0" indent="0">
               <a:buNone/>
             </a:pPr>
             <a:r>
@@ -12691,6 +13450,13 @@
             <a:prstDash val="solid"/>
           </a:ln>
         </p:spPr>
+        <p:txBody>
+          <a:bodyPr/>
+          <a:lstStyle/>
+          <a:p>
+            <a:endParaRPr lang="en-US"/>
+          </a:p>
+        </p:txBody>
       </p:sp>
       <p:sp>
         <p:nvSpPr>
@@ -12715,7 +13481,7 @@
           </a:bodyPr>
           <a:lstStyle/>
           <a:p>
-            <a:pPr indent="0" marL="0">
+            <a:pPr marL="0" indent="0">
               <a:buNone/>
             </a:pPr>
             <a:r>
@@ -12754,6 +13520,13 @@
             <a:prstDash val="solid"/>
           </a:ln>
         </p:spPr>
+        <p:txBody>
+          <a:bodyPr/>
+          <a:lstStyle/>
+          <a:p>
+            <a:endParaRPr lang="en-US"/>
+          </a:p>
+        </p:txBody>
       </p:sp>
       <p:sp>
         <p:nvSpPr>
@@ -12778,7 +13551,7 @@
           </a:bodyPr>
           <a:lstStyle/>
           <a:p>
-            <a:pPr indent="0" marL="0">
+            <a:pPr marL="0" indent="0">
               <a:buNone/>
             </a:pPr>
             <a:r>
@@ -12817,6 +13590,13 @@
             <a:prstDash val="solid"/>
           </a:ln>
         </p:spPr>
+        <p:txBody>
+          <a:bodyPr/>
+          <a:lstStyle/>
+          <a:p>
+            <a:endParaRPr lang="en-US"/>
+          </a:p>
+        </p:txBody>
       </p:sp>
       <p:sp>
         <p:nvSpPr>
@@ -12841,7 +13621,7 @@
           </a:bodyPr>
           <a:lstStyle/>
           <a:p>
-            <a:pPr indent="0" marL="0">
+            <a:pPr marL="0" indent="0">
               <a:buNone/>
             </a:pPr>
             <a:r>
@@ -12880,6 +13660,13 @@
             <a:prstDash val="solid"/>
           </a:ln>
         </p:spPr>
+        <p:txBody>
+          <a:bodyPr/>
+          <a:lstStyle/>
+          <a:p>
+            <a:endParaRPr lang="en-US"/>
+          </a:p>
+        </p:txBody>
       </p:sp>
       <p:sp>
         <p:nvSpPr>
@@ -12904,7 +13691,7 @@
           </a:bodyPr>
           <a:lstStyle/>
           <a:p>
-            <a:pPr indent="0" marL="0">
+            <a:pPr marL="0" indent="0">
               <a:buNone/>
             </a:pPr>
             <a:r>
@@ -12945,13 +13732,20 @@
             <a:prstDash val="solid"/>
           </a:ln>
           <a:effectLst>
-            <a:outerShdw sx="100000" sy="100000" kx="0" ky="0" algn="bl" rotWithShape="0" blurRad="12700" dist="50800" dir="2700000">
+            <a:outerShdw blurRad="12700" dist="50800" dir="2700000" algn="bl" rotWithShape="0">
               <a:srgbClr val="000000">
                 <a:alpha val="7000"/>
               </a:srgbClr>
             </a:outerShdw>
           </a:effectLst>
         </p:spPr>
+        <p:txBody>
+          <a:bodyPr/>
+          <a:lstStyle/>
+          <a:p>
+            <a:endParaRPr lang="en-US"/>
+          </a:p>
+        </p:txBody>
       </p:sp>
       <p:sp>
         <p:nvSpPr>
@@ -12974,7 +13768,7 @@
           <a:bodyPr wrap="square" lIns="0" tIns="0" rIns="0" bIns="0" rtlCol="0" anchor="ctr"/>
           <a:lstStyle/>
           <a:p>
-            <a:pPr indent="0" marL="0">
+            <a:pPr marL="0" indent="0">
               <a:buNone/>
             </a:pPr>
             <a:r>
@@ -13011,6 +13805,13 @@
             <a:prstDash val="solid"/>
           </a:ln>
         </p:spPr>
+        <p:txBody>
+          <a:bodyPr/>
+          <a:lstStyle/>
+          <a:p>
+            <a:endParaRPr lang="en-US"/>
+          </a:p>
+        </p:txBody>
       </p:sp>
       <p:sp>
         <p:nvSpPr>
@@ -13036,6 +13837,13 @@
             <a:prstDash val="solid"/>
           </a:ln>
         </p:spPr>
+        <p:txBody>
+          <a:bodyPr/>
+          <a:lstStyle/>
+          <a:p>
+            <a:endParaRPr lang="en-US"/>
+          </a:p>
+        </p:txBody>
       </p:sp>
       <p:sp>
         <p:nvSpPr>
@@ -13058,7 +13866,7 @@
           <a:bodyPr wrap="square" lIns="0" tIns="0" rIns="0" bIns="0" rtlCol="0" anchor="ctr"/>
           <a:lstStyle/>
           <a:p>
-            <a:pPr indent="0" marL="0">
+            <a:pPr marL="0" indent="0">
               <a:buNone/>
             </a:pPr>
             <a:r>
@@ -13094,7 +13902,7 @@
           <a:bodyPr wrap="square" lIns="0" tIns="0" rIns="0" bIns="0" rtlCol="0" anchor="ctr"/>
           <a:lstStyle/>
           <a:p>
-            <a:pPr indent="0" marL="0">
+            <a:pPr marL="0" indent="0">
               <a:buNone/>
             </a:pPr>
             <a:r>
@@ -13130,7 +13938,7 @@
           <a:bodyPr wrap="square" lIns="0" tIns="0" rIns="0" bIns="0" rtlCol="0" anchor="ctr"/>
           <a:lstStyle/>
           <a:p>
-            <a:pPr indent="0" marL="0">
+            <a:pPr marL="0" indent="0">
               <a:buNone/>
             </a:pPr>
             <a:r>
@@ -13169,6 +13977,13 @@
             <a:prstDash val="solid"/>
           </a:ln>
         </p:spPr>
+        <p:txBody>
+          <a:bodyPr/>
+          <a:lstStyle/>
+          <a:p>
+            <a:endParaRPr lang="en-US"/>
+          </a:p>
+        </p:txBody>
       </p:sp>
       <p:sp>
         <p:nvSpPr>
@@ -13191,7 +14006,7 @@
           <a:bodyPr wrap="square" lIns="0" tIns="0" rIns="0" bIns="0" rtlCol="0" anchor="ctr"/>
           <a:lstStyle/>
           <a:p>
-            <a:pPr indent="0" marL="0">
+            <a:pPr marL="0" indent="0">
               <a:buNone/>
             </a:pPr>
             <a:r>
@@ -13227,7 +14042,7 @@
           <a:bodyPr wrap="square" lIns="0" tIns="0" rIns="0" bIns="0" rtlCol="0" anchor="ctr"/>
           <a:lstStyle/>
           <a:p>
-            <a:pPr indent="0" marL="0">
+            <a:pPr marL="0" indent="0">
               <a:buNone/>
             </a:pPr>
             <a:r>
@@ -13263,7 +14078,7 @@
           <a:bodyPr wrap="square" lIns="0" tIns="0" rIns="0" bIns="0" rtlCol="0" anchor="ctr"/>
           <a:lstStyle/>
           <a:p>
-            <a:pPr indent="0" marL="0">
+            <a:pPr marL="0" indent="0">
               <a:buNone/>
             </a:pPr>
             <a:r>
@@ -13301,7 +14116,7 @@
           </a:bodyPr>
           <a:lstStyle/>
           <a:p>
-            <a:pPr indent="0" marL="0">
+            <a:pPr marL="0" indent="0">
               <a:buNone/>
             </a:pPr>
             <a:r>
@@ -13617,4 +14432,325 @@
     </a:ext>
   </a:extLst>
 </a:theme>
+</file>
+
+<file path=ppt/theme/theme2.xml><?xml version="1.0" encoding="utf-8"?>
+<a:theme xmlns:a="http://schemas.openxmlformats.org/drawingml/2006/main" name="Office Theme">
+  <a:themeElements>
+    <a:clrScheme name="Office">
+      <a:dk1>
+        <a:sysClr val="windowText" lastClr="000000"/>
+      </a:dk1>
+      <a:lt1>
+        <a:sysClr val="window" lastClr="FFFFFF"/>
+      </a:lt1>
+      <a:dk2>
+        <a:srgbClr val="0E2841"/>
+      </a:dk2>
+      <a:lt2>
+        <a:srgbClr val="E8E8E8"/>
+      </a:lt2>
+      <a:accent1>
+        <a:srgbClr val="156082"/>
+      </a:accent1>
+      <a:accent2>
+        <a:srgbClr val="E97132"/>
+      </a:accent2>
+      <a:accent3>
+        <a:srgbClr val="196B24"/>
+      </a:accent3>
+      <a:accent4>
+        <a:srgbClr val="0F9ED5"/>
+      </a:accent4>
+      <a:accent5>
+        <a:srgbClr val="A02B93"/>
+      </a:accent5>
+      <a:accent6>
+        <a:srgbClr val="4EA72E"/>
+      </a:accent6>
+      <a:hlink>
+        <a:srgbClr val="467886"/>
+      </a:hlink>
+      <a:folHlink>
+        <a:srgbClr val="96607D"/>
+      </a:folHlink>
+    </a:clrScheme>
+    <a:fontScheme name="Office">
+      <a:majorFont>
+        <a:latin typeface="Aptos Display" panose="02110004020202020204"/>
+        <a:ea typeface=""/>
+        <a:cs typeface=""/>
+        <a:font script="Jpan" typeface="游ゴシック Light"/>
+        <a:font script="Hang" typeface="맑은 고딕"/>
+        <a:font script="Hans" typeface="等线 Light"/>
+        <a:font script="Hant" typeface="新細明體"/>
+        <a:font script="Arab" typeface="Times New Roman"/>
+        <a:font script="Hebr" typeface="Times New Roman"/>
+        <a:font script="Thai" typeface="Angsana New"/>
+        <a:font script="Ethi" typeface="Nyala"/>
+        <a:font script="Beng" typeface="Vrinda"/>
+        <a:font script="Gujr" typeface="Shruti"/>
+        <a:font script="Khmr" typeface="MoolBoran"/>
+        <a:font script="Knda" typeface="Tunga"/>
+        <a:font script="Guru" typeface="Raavi"/>
+        <a:font script="Cans" typeface="Euphemia"/>
+        <a:font script="Cher" typeface="Plantagenet Cherokee"/>
+        <a:font script="Yiii" typeface="Microsoft Yi Baiti"/>
+        <a:font script="Tibt" typeface="Microsoft Himalaya"/>
+        <a:font script="Thaa" typeface="MV Boli"/>
+        <a:font script="Deva" typeface="Mangal"/>
+        <a:font script="Telu" typeface="Gautami"/>
+        <a:font script="Taml" typeface="Latha"/>
+        <a:font script="Syrc" typeface="Estrangelo Edessa"/>
+        <a:font script="Orya" typeface="Kalinga"/>
+        <a:font script="Mlym" typeface="Kartika"/>
+        <a:font script="Laoo" typeface="DokChampa"/>
+        <a:font script="Sinh" typeface="Iskoola Pota"/>
+        <a:font script="Mong" typeface="Mongolian Baiti"/>
+        <a:font script="Viet" typeface="Times New Roman"/>
+        <a:font script="Uigh" typeface="Microsoft Uighur"/>
+        <a:font script="Geor" typeface="Sylfaen"/>
+        <a:font script="Armn" typeface="Arial"/>
+        <a:font script="Bugi" typeface="Leelawadee UI"/>
+        <a:font script="Bopo" typeface="Microsoft JhengHei"/>
+        <a:font script="Java" typeface="Javanese Text"/>
+        <a:font script="Lisu" typeface="Segoe UI"/>
+        <a:font script="Mymr" typeface="Myanmar Text"/>
+        <a:font script="Nkoo" typeface="Ebrima"/>
+        <a:font script="Olck" typeface="Nirmala UI"/>
+        <a:font script="Osma" typeface="Ebrima"/>
+        <a:font script="Phag" typeface="Phagspa"/>
+        <a:font script="Syrn" typeface="Estrangelo Edessa"/>
+        <a:font script="Syrj" typeface="Estrangelo Edessa"/>
+        <a:font script="Syre" typeface="Estrangelo Edessa"/>
+        <a:font script="Sora" typeface="Nirmala UI"/>
+        <a:font script="Tale" typeface="Microsoft Tai Le"/>
+        <a:font script="Talu" typeface="Microsoft New Tai Lue"/>
+        <a:font script="Tfng" typeface="Ebrima"/>
+      </a:majorFont>
+      <a:minorFont>
+        <a:latin typeface="Aptos" panose="02110004020202020204"/>
+        <a:ea typeface=""/>
+        <a:cs typeface=""/>
+        <a:font script="Jpan" typeface="游ゴシック"/>
+        <a:font script="Hang" typeface="맑은 고딕"/>
+        <a:font script="Hans" typeface="等线"/>
+        <a:font script="Hant" typeface="新細明體"/>
+        <a:font script="Arab" typeface="Arial"/>
+        <a:font script="Hebr" typeface="Arial"/>
+        <a:font script="Thai" typeface="Cordia New"/>
+        <a:font script="Ethi" typeface="Nyala"/>
+        <a:font script="Beng" typeface="Vrinda"/>
+        <a:font script="Gujr" typeface="Shruti"/>
+        <a:font script="Khmr" typeface="DaunPenh"/>
+        <a:font script="Knda" typeface="Tunga"/>
+        <a:font script="Guru" typeface="Raavi"/>
+        <a:font script="Cans" typeface="Euphemia"/>
+        <a:font script="Cher" typeface="Plantagenet Cherokee"/>
+        <a:font script="Yiii" typeface="Microsoft Yi Baiti"/>
+        <a:font script="Tibt" typeface="Microsoft Himalaya"/>
+        <a:font script="Thaa" typeface="MV Boli"/>
+        <a:font script="Deva" typeface="Mangal"/>
+        <a:font script="Telu" typeface="Gautami"/>
+        <a:font script="Taml" typeface="Latha"/>
+        <a:font script="Syrc" typeface="Estrangelo Edessa"/>
+        <a:font script="Orya" typeface="Kalinga"/>
+        <a:font script="Mlym" typeface="Kartika"/>
+        <a:font script="Laoo" typeface="DokChampa"/>
+        <a:font script="Sinh" typeface="Iskoola Pota"/>
+        <a:font script="Mong" typeface="Mongolian Baiti"/>
+        <a:font script="Viet" typeface="Arial"/>
+        <a:font script="Uigh" typeface="Microsoft Uighur"/>
+        <a:font script="Geor" typeface="Sylfaen"/>
+        <a:font script="Armn" typeface="Arial"/>
+        <a:font script="Bugi" typeface="Leelawadee UI"/>
+        <a:font script="Bopo" typeface="Microsoft JhengHei"/>
+        <a:font script="Java" typeface="Javanese Text"/>
+        <a:font script="Lisu" typeface="Segoe UI"/>
+        <a:font script="Mymr" typeface="Myanmar Text"/>
+        <a:font script="Nkoo" typeface="Ebrima"/>
+        <a:font script="Olck" typeface="Nirmala UI"/>
+        <a:font script="Osma" typeface="Ebrima"/>
+        <a:font script="Phag" typeface="Phagspa"/>
+        <a:font script="Syrn" typeface="Estrangelo Edessa"/>
+        <a:font script="Syrj" typeface="Estrangelo Edessa"/>
+        <a:font script="Syre" typeface="Estrangelo Edessa"/>
+        <a:font script="Sora" typeface="Nirmala UI"/>
+        <a:font script="Tale" typeface="Microsoft Tai Le"/>
+        <a:font script="Talu" typeface="Microsoft New Tai Lue"/>
+        <a:font script="Tfng" typeface="Ebrima"/>
+      </a:minorFont>
+    </a:fontScheme>
+    <a:fmtScheme name="Office">
+      <a:fillStyleLst>
+        <a:solidFill>
+          <a:schemeClr val="phClr"/>
+        </a:solidFill>
+        <a:gradFill rotWithShape="1">
+          <a:gsLst>
+            <a:gs pos="0">
+              <a:schemeClr val="phClr">
+                <a:lumMod val="110000"/>
+                <a:satMod val="105000"/>
+                <a:tint val="67000"/>
+              </a:schemeClr>
+            </a:gs>
+            <a:gs pos="50000">
+              <a:schemeClr val="phClr">
+                <a:lumMod val="105000"/>
+                <a:satMod val="103000"/>
+                <a:tint val="73000"/>
+              </a:schemeClr>
+            </a:gs>
+            <a:gs pos="100000">
+              <a:schemeClr val="phClr">
+                <a:lumMod val="105000"/>
+                <a:satMod val="109000"/>
+                <a:tint val="81000"/>
+              </a:schemeClr>
+            </a:gs>
+          </a:gsLst>
+          <a:lin ang="5400000" scaled="0"/>
+        </a:gradFill>
+        <a:gradFill rotWithShape="1">
+          <a:gsLst>
+            <a:gs pos="0">
+              <a:schemeClr val="phClr">
+                <a:satMod val="103000"/>
+                <a:lumMod val="102000"/>
+                <a:tint val="94000"/>
+              </a:schemeClr>
+            </a:gs>
+            <a:gs pos="50000">
+              <a:schemeClr val="phClr">
+                <a:satMod val="110000"/>
+                <a:lumMod val="100000"/>
+                <a:shade val="100000"/>
+              </a:schemeClr>
+            </a:gs>
+            <a:gs pos="100000">
+              <a:schemeClr val="phClr">
+                <a:lumMod val="99000"/>
+                <a:satMod val="120000"/>
+                <a:shade val="78000"/>
+              </a:schemeClr>
+            </a:gs>
+          </a:gsLst>
+          <a:lin ang="5400000" scaled="0"/>
+        </a:gradFill>
+      </a:fillStyleLst>
+      <a:lnStyleLst>
+        <a:ln w="12700" cap="flat" cmpd="sng" algn="ctr">
+          <a:solidFill>
+            <a:schemeClr val="phClr"/>
+          </a:solidFill>
+          <a:prstDash val="solid"/>
+          <a:miter lim="800000"/>
+        </a:ln>
+        <a:ln w="19050" cap="flat" cmpd="sng" algn="ctr">
+          <a:solidFill>
+            <a:schemeClr val="phClr"/>
+          </a:solidFill>
+          <a:prstDash val="solid"/>
+          <a:miter lim="800000"/>
+        </a:ln>
+        <a:ln w="25400" cap="flat" cmpd="sng" algn="ctr">
+          <a:solidFill>
+            <a:schemeClr val="phClr"/>
+          </a:solidFill>
+          <a:prstDash val="solid"/>
+          <a:miter lim="800000"/>
+        </a:ln>
+      </a:lnStyleLst>
+      <a:effectStyleLst>
+        <a:effectStyle>
+          <a:effectLst/>
+        </a:effectStyle>
+        <a:effectStyle>
+          <a:effectLst/>
+        </a:effectStyle>
+        <a:effectStyle>
+          <a:effectLst>
+            <a:outerShdw blurRad="57150" dist="19050" dir="5400000" algn="ctr" rotWithShape="0">
+              <a:srgbClr val="000000">
+                <a:alpha val="63000"/>
+              </a:srgbClr>
+            </a:outerShdw>
+          </a:effectLst>
+        </a:effectStyle>
+      </a:effectStyleLst>
+      <a:bgFillStyleLst>
+        <a:solidFill>
+          <a:schemeClr val="phClr"/>
+        </a:solidFill>
+        <a:solidFill>
+          <a:schemeClr val="phClr">
+            <a:tint val="95000"/>
+            <a:satMod val="170000"/>
+          </a:schemeClr>
+        </a:solidFill>
+        <a:gradFill rotWithShape="1">
+          <a:gsLst>
+            <a:gs pos="0">
+              <a:schemeClr val="phClr">
+                <a:tint val="93000"/>
+                <a:satMod val="150000"/>
+                <a:shade val="98000"/>
+                <a:lumMod val="102000"/>
+              </a:schemeClr>
+            </a:gs>
+            <a:gs pos="50000">
+              <a:schemeClr val="phClr">
+                <a:tint val="98000"/>
+                <a:satMod val="130000"/>
+                <a:shade val="90000"/>
+                <a:lumMod val="103000"/>
+              </a:schemeClr>
+            </a:gs>
+            <a:gs pos="100000">
+              <a:schemeClr val="phClr">
+                <a:shade val="63000"/>
+                <a:satMod val="120000"/>
+              </a:schemeClr>
+            </a:gs>
+          </a:gsLst>
+          <a:lin ang="5400000" scaled="0"/>
+        </a:gradFill>
+      </a:bgFillStyleLst>
+    </a:fmtScheme>
+  </a:themeElements>
+  <a:objectDefaults>
+    <a:lnDef>
+      <a:spPr/>
+      <a:bodyPr/>
+      <a:lstStyle/>
+      <a:style>
+        <a:lnRef idx="2">
+          <a:schemeClr val="accent1"/>
+        </a:lnRef>
+        <a:fillRef idx="0">
+          <a:schemeClr val="accent1"/>
+        </a:fillRef>
+        <a:effectRef idx="1">
+          <a:schemeClr val="accent1"/>
+        </a:effectRef>
+        <a:fontRef idx="minor">
+          <a:schemeClr val="tx1"/>
+        </a:fontRef>
+      </a:style>
+    </a:lnDef>
+  </a:objectDefaults>
+  <a:extraClrSchemeLst/>
+  <a:extLst>
+    <a:ext uri="{05A4C25C-085E-4340-85A3-A5531E510DB2}">
+      <thm15:themeFamily xmlns:thm15="http://schemas.microsoft.com/office/thememl/2012/main" name="Office Theme" id="{2E142A2C-CD16-42D6-873A-C26D2A0506FA}" vid="{1BDDFF52-6CD6-40A5-AB3C-68EB2F1E4D0A}"/>
+    </a:ext>
+  </a:extLst>
+</a:theme>
+</file>
+
+<file path=docMetadata/LabelInfo.xml><?xml version="1.0" encoding="utf-8"?>
+<clbl:labelList xmlns:clbl="http://schemas.microsoft.com/office/2020/mipLabelMetadata">
+  <clbl:label id="{825c952f-1947-4719-99e7-7bc5a76060a8}" enabled="1" method="Standard" siteId="{4e2c6054-71cb-48f1-bd6c-3a9705aca71b}" contentBits="3" removed="0"/>
+</clbl:labelList>
 </file>